--- a/research/ftir_ec_phase3/deliverables/ann_briefing_2026-08-12.pptx
+++ b/research/ftir_ec_phase3/deliverables/ann_briefing_2026-08-12.pptx
@@ -125,6 +125,361 @@
 </p:presentation>
 </file>
 
+<file path=ppt/charts/chart1.xml><?xml version="1.0" encoding="utf-8"?>
+<c:chartSpace xmlns:c="http://schemas.openxmlformats.org/drawingml/2006/chart" xmlns:a="http://schemas.openxmlformats.org/drawingml/2006/main" xmlns:r="http://schemas.openxmlformats.org/officeDocument/2006/relationships">
+  <c:date1904 val="0"/>
+  <c:roundedCorners val="1"/>
+  <c:chart>
+    <c:title>
+      <c:tx>
+        <c:rich>
+          <a:bodyPr/>
+          <a:lstStyle/>
+          <a:p>
+            <a:pPr>
+              <a:defRPr sz="1200" b="0" i="0" u="none" strike="noStrike">
+                <a:solidFill>
+                  <a:srgbClr val="1A1D21"/>
+                </a:solidFill>
+                <a:latin typeface="Calibri"/>
+              </a:defRPr>
+            </a:pPr>
+            <a:r>
+              <a:rPr sz="1200" b="0" i="0" u="none" strike="noStrike">
+                <a:solidFill>
+                  <a:srgbClr val="1A1D21"/>
+                </a:solidFill>
+                <a:latin typeface="Calibri"/>
+              </a:rPr>
+              <a:t>Each bar scored on its OWN site-disjoint split — ranks were never comparable</a:t>
+            </a:r>
+          </a:p>
+        </c:rich>
+      </c:tx>
+      <c:layout/>
+      <c:overlay val="0"/>
+    </c:title>
+    <c:autoTitleDeleted val="0"/>
+    <c:plotArea>
+      <c:layout/>
+      <c:barChart>
+        <c:barDir val="col"/>
+        <c:grouping val="clustered"/>
+        <c:varyColors val="0"/>
+        <c:ser>
+          <c:idx val="0"/>
+          <c:order val="0"/>
+          <c:tx>
+            <c:strRef>
+              <c:f>Sheet1!$B$1</c:f>
+              <c:strCache>
+                <c:ptCount val="1"/>
+                <c:pt idx="0">
+                  <c:v>held-out TOR RMSE</c:v>
+                </c:pt>
+              </c:strCache>
+            </c:strRef>
+          </c:tx>
+          <c:spPr>
+            <a:solidFill>
+              <a:srgbClr val="7A4FA3"/>
+            </a:solidFill>
+            <a:effectLst/>
+          </c:spPr>
+          <c:invertIfNegative val="0"/>
+          <c:dLbls>
+            <c:numFmt formatCode="0.00" sourceLinked="0"/>
+            <c:txPr>
+              <a:bodyPr/>
+              <a:lstStyle/>
+              <a:p>
+                <a:pPr>
+                  <a:defRPr b="0" i="0" strike="noStrike" sz="1000" u="none">
+                    <a:solidFill>
+                      <a:srgbClr val="5E6369"/>
+                    </a:solidFill>
+                    <a:latin typeface="Arial"/>
+                  </a:defRPr>
+                </a:pPr>
+              </a:p>
+            </c:txPr>
+            <c:showLegendKey val="0"/>
+            <c:showVal val="1"/>
+            <c:showCatName val="0"/>
+            <c:showSerName val="0"/>
+            <c:showPercent val="0"/>
+            <c:showBubbleSize val="0"/>
+            <c:showLeaderLines val="0"/>
+          </c:dLbls>
+          <c:dPt>
+            <c:idx val="0"/>
+            <c:invertIfNegative val="0"/>
+            <c:bubble3D val="0"/>
+            <c:spPr>
+              <a:solidFill>
+                <a:srgbClr val="7A4FA3"/>
+              </a:solidFill>
+              <a:effectLst/>
+            </c:spPr>
+          </c:dPt>
+          <c:dPt>
+            <c:idx val="1"/>
+            <c:invertIfNegative val="0"/>
+            <c:bubble3D val="0"/>
+            <c:spPr>
+              <a:solidFill>
+                <a:srgbClr val="8F8C84"/>
+              </a:solidFill>
+              <a:effectLst/>
+            </c:spPr>
+          </c:dPt>
+          <c:dPt>
+            <c:idx val="2"/>
+            <c:invertIfNegative val="0"/>
+            <c:bubble3D val="0"/>
+            <c:spPr>
+              <a:solidFill>
+                <a:srgbClr val="8F8C84"/>
+              </a:solidFill>
+              <a:effectLst/>
+            </c:spPr>
+          </c:dPt>
+          <c:dPt>
+            <c:idx val="3"/>
+            <c:invertIfNegative val="0"/>
+            <c:bubble3D val="0"/>
+            <c:spPr>
+              <a:solidFill>
+                <a:srgbClr val="B23327"/>
+              </a:solidFill>
+              <a:effectLst/>
+            </c:spPr>
+          </c:dPt>
+          <c:dPt>
+            <c:idx val="4"/>
+            <c:invertIfNegative val="0"/>
+            <c:bubble3D val="0"/>
+            <c:spPr>
+              <a:solidFill>
+                <a:srgbClr val="8F8C84"/>
+              </a:solidFill>
+              <a:effectLst/>
+            </c:spPr>
+          </c:dPt>
+          <c:dPt>
+            <c:idx val="5"/>
+            <c:invertIfNegative val="0"/>
+            <c:bubble3D val="0"/>
+            <c:spPr>
+              <a:solidFill>
+                <a:srgbClr val="8F8C84"/>
+              </a:solidFill>
+              <a:effectLst/>
+            </c:spPr>
+          </c:dPt>
+          <c:cat>
+            <c:multiLvlStrRef>
+              <c:f>Sheet1!$A$2:$A$7</c:f>
+              <c:multiLvlStrCache>
+                <c:ptCount val="6"/>
+                <c:lvl>
+                  <c:pt idx="0">
+                    <c:v>OCEC-800</c:v>
+                  </c:pt>
+                  <c:pt idx="1">
+                    <c:v>random #1</c:v>
+                  </c:pt>
+                  <c:pt idx="2">
+                    <c:v>random #2</c:v>
+                  </c:pt>
+                  <c:pt idx="3">
+                    <c:v>random #3</c:v>
+                  </c:pt>
+                  <c:pt idx="4">
+                    <c:v>random #4</c:v>
+                  </c:pt>
+                  <c:pt idx="5">
+                    <c:v>random #5</c:v>
+                  </c:pt>
+                </c:lvl>
+              </c:multiLvlStrCache>
+            </c:multiLvlStrRef>
+          </c:cat>
+          <c:val>
+            <c:numRef>
+              <c:f>Sheet1!$B$2:$B$7</c:f>
+              <c:numCache>
+                <c:formatCode>General</c:formatCode>
+                <c:ptCount val="6"/>
+                <c:pt idx="0">
+                  <c:v>3.415</c:v>
+                </c:pt>
+                <c:pt idx="1">
+                  <c:v>3.895</c:v>
+                </c:pt>
+                <c:pt idx="2">
+                  <c:v>4.35</c:v>
+                </c:pt>
+                <c:pt idx="3">
+                  <c:v>3.097</c:v>
+                </c:pt>
+                <c:pt idx="4">
+                  <c:v>3.471</c:v>
+                </c:pt>
+                <c:pt idx="5">
+                  <c:v>4.998</c:v>
+                </c:pt>
+              </c:numCache>
+            </c:numRef>
+          </c:val>
+        </c:ser>
+        <c:dLbls>
+          <c:numFmt formatCode="0.00" sourceLinked="0"/>
+          <c:txPr>
+            <a:bodyPr/>
+            <a:lstStyle/>
+            <a:p>
+              <a:pPr>
+                <a:defRPr b="0" i="0" strike="noStrike" sz="1000" u="none">
+                  <a:solidFill>
+                    <a:srgbClr val="5E6369"/>
+                  </a:solidFill>
+                  <a:latin typeface="Arial"/>
+                </a:defRPr>
+              </a:pPr>
+            </a:p>
+          </c:txPr>
+          <c:showLegendKey val="0"/>
+          <c:showVal val="1"/>
+          <c:showCatName val="0"/>
+          <c:showSerName val="0"/>
+          <c:showPercent val="0"/>
+          <c:showBubbleSize val="0"/>
+          <c:showLeaderLines val="0"/>
+        </c:dLbls>
+        <c:gapWidth val="150"/>
+        <c:overlap val="0"/>
+        <c:axId val="2094734554"/>
+        <c:axId val="2094734552"/>
+        <c:axId val="2094734556"/>
+      </c:barChart>
+      <c:catAx>
+        <c:axId val="2094734554"/>
+        <c:scaling>
+          <c:orientation val="minMax"/>
+        </c:scaling>
+        <c:delete val="0"/>
+        <c:axPos val="b"/>
+        <c:numFmt formatCode="General" sourceLinked="1"/>
+        <c:majorTickMark val="out"/>
+        <c:minorTickMark val="none"/>
+        <c:tickLblPos val="low"/>
+        <c:spPr>
+          <a:ln w="12700" cap="flat">
+            <a:solidFill>
+              <a:srgbClr val="888888"/>
+            </a:solidFill>
+            <a:prstDash val="solid"/>
+            <a:round/>
+          </a:ln>
+        </c:spPr>
+        <c:txPr>
+          <a:bodyPr/>
+          <a:lstStyle/>
+          <a:p>
+            <a:pPr>
+              <a:defRPr sz="1100" b="0" i="0" u="none" strike="noStrike">
+                <a:solidFill>
+                  <a:srgbClr val="5E6369"/>
+                </a:solidFill>
+                <a:latin typeface="Arial"/>
+              </a:defRPr>
+            </a:pPr>
+            <a:endParaRPr lang="en-US"/>
+          </a:p>
+        </c:txPr>
+        <c:crossAx val="2094734552"/>
+        <c:crosses val="autoZero"/>
+        <c:auto val="1"/>
+        <c:lblAlgn val="ctr"/>
+        <c:noMultiLvlLbl val="1"/>
+      </c:catAx>
+      <c:valAx>
+        <c:axId val="2094734552"/>
+        <c:scaling>
+          <c:orientation val="minMax"/>
+          <c:max val="5.5"/>
+          <c:min val="0"/>
+        </c:scaling>
+        <c:delete val="0"/>
+        <c:axPos val="l"/>
+        <c:majorGridlines>
+          <c:spPr>
+            <a:ln w="6350" cap="flat">
+              <a:solidFill>
+                <a:srgbClr val="DDE0DC"/>
+              </a:solidFill>
+              <a:prstDash val="solid"/>
+              <a:round/>
+            </a:ln>
+          </c:spPr>
+        </c:majorGridlines>
+        <c:numFmt formatCode="General" sourceLinked="0"/>
+        <c:majorTickMark val="out"/>
+        <c:minorTickMark val="none"/>
+        <c:tickLblPos val="nextTo"/>
+        <c:spPr>
+          <a:ln w="12700" cap="flat">
+            <a:solidFill>
+              <a:srgbClr val="888888"/>
+            </a:solidFill>
+            <a:prstDash val="solid"/>
+            <a:round/>
+          </a:ln>
+        </c:spPr>
+        <c:txPr>
+          <a:bodyPr/>
+          <a:lstStyle/>
+          <a:p>
+            <a:pPr>
+              <a:defRPr sz="1000" b="0" i="0" u="none" strike="noStrike">
+                <a:solidFill>
+                  <a:srgbClr val="8A9098"/>
+                </a:solidFill>
+                <a:latin typeface="Arial"/>
+              </a:defRPr>
+            </a:pPr>
+            <a:endParaRPr lang="en-US"/>
+          </a:p>
+        </c:txPr>
+        <c:crossAx val="2094734554"/>
+        <c:crosses val="autoZero"/>
+        <c:crossBetween val="between"/>
+      </c:valAx>
+      <c:spPr>
+        <a:noFill/>
+        <a:ln>
+          <a:noFill/>
+        </a:ln>
+        <a:effectLst/>
+      </c:spPr>
+    </c:plotArea>
+    <c:plotVisOnly val="1"/>
+    <c:dispBlanksAs val="span"/>
+  </c:chart>
+  <c:spPr>
+    <a:noFill/>
+    <a:ln>
+      <a:noFill/>
+    </a:ln>
+    <a:effectLst/>
+  </c:spPr>
+  <c:externalData r:id="rId1">
+    <c:autoUpdate val="0"/>
+  </c:externalData>
+</c:chartSpace>
+</file>
+
 <file path=ppt/notesMasters/notesMaster1.xml><?xml version="1.0" encoding="utf-8"?>
 <p:notesMaster xmlns:a="http://schemas.openxmlformats.org/drawingml/2006/main" xmlns:r="http://schemas.openxmlformats.org/officeDocument/2006/relationships" xmlns:p="http://schemas.openxmlformats.org/presentationml/2006/main">
   <p:cSld>
@@ -608,7 +963,8 @@
           <a:p>
             <a:r>
               <a:rPr lang="en-US" dirty="0"/>
-              <a:t>This is the answer to your July question — why is the intercept negative when nothing at Addis is. Set predicted EC to zero and the intercept becomes a quantity you could go and look for: about 21 inverse megametres at the HIPS wavelength with no FTIR-EC behind it. If she pushes on what it licenses: nothing about the cause on its own — the next slide starts eliminating candidates.</a:t>
+              <a:t>SAY: This is the answer to your July question — why is the intercept negative when nothing at Addis is. Set predicted EC to zero and the intercept becomes a quantity you could go and look for: about 21 inverse megametres at the HIPS wavelength with no FTIR-EC behind it — 46 percent of a typical Addis filter.
+IF SHE PUSHES on what it licenses: nothing about the cause on its own — brown carbon, dust, a HIPS artifact and curve geometry are all still live on this slide alone; the next two slides start eliminating them. IF SHE PUSHES on the −7.3%: it is systematic — c runs 1.885–2.608 across setups, best setup lowest; a shared c costs only 1.6% in RSS but is confounded by the same gain-invariance.</a:t>
             </a:r>
             <a:endParaRPr lang="en-US" dirty="0"/>
           </a:p>
@@ -696,7 +1052,7 @@
           <a:p>
             <a:r>
               <a:rPr lang="en-US" dirty="0"/>
-              <a:t>Give this slide the most air. The generic-zero door is closed with committed numbers. What survives: curvature and a loading-dependent artifact — and real non-EC absorption, which nothing in hand can now separate, because of the next slide. That four-directions narrowing is the case for quartz TOR.</a:t>
+              <a:t>Give this the most air — it is both the strongest support and the sharpest caveat. SAY: Tier-1 item one came back. The question was whether HIPS generically reads a few inverse megametres at zero EC. It does not — the intercept is at most 1.3 pooled, 0.1 in the Addis-like subset, the median at zero EC is +0.12 with a quarter of filters negative: zero at zero with symmetric noise. And only 0.01 percent of IMPROVE filters carry as much total absorption as Addis's median — a generic 21-megametre offset cannot exist in that dataset. Then give the two survivors, slowly. IF SHE ASKS about testing curvature at Addis directly: it needs an EC reference derived from neither Fabs nor FTIR — after ftir_27 there is none in hand; it waits on quartz TOR. IF SHE ASKS about the 170/176 significant sites: n-power, not magnitude — no site reaches 5 Mm⁻¹.</a:t>
             </a:r>
             <a:endParaRPr lang="en-US" dirty="0"/>
           </a:p>
@@ -784,7 +1140,7 @@
           <a:p>
             <a:r>
               <a:rPr lang="en-US" dirty="0"/>
-              <a:t>Get ahead of it: if she read ftir_25 yesterday, she saw the wrong version. Say plainly that the correction standard caught your own error the same way it caught the audit items — that is the system working. ChemSpec_OC is circular too. The three proofs: bit-for-bit rounding lattice, the shared per-filter volume-revision ratio across BC/EC/OC, and the network-wide slope of 10.</a:t>
+              <a:t>Get ahead of it: if she read ftir_25 yesterday, she saw the wrong version — say plainly that the correction standard caught your own error the same way it caught the audit items. ChemSpec_OC is circular too. Three proofs: the bit-for-bit rounding lattice, the shared per-filter volume-revision ratio across BC/EC/OC, and the network-wide slope of 10.</a:t>
             </a:r>
             <a:endParaRPr lang="en-US" dirty="0"/>
           </a:p>
@@ -872,7 +1228,7 @@
           <a:p>
             <a:r>
               <a:rPr lang="en-US" dirty="0"/>
-              <a:t>If she asks who confirmed it: Ahmad, this morning, from SPARTAN's public Instruments page and the 2025 methods paper — SPARTAN-side sources, which is exactly what the optics reference said was missing. If she cannot answer the semantics question today, assign the ask: who emails SPARTAN, before or after tomorrow.</a:t>
+              <a:t>If she asks who confirmed it: Ahmad, this morning, from SPARTAN's public Instruments page and the 2025 methods paper — SPARTAN-side sources, exactly what the optics reference said was missing. If she cannot answer the semantics question today, assign the ask: who emails SPARTAN, before or after tomorrow.</a:t>
             </a:r>
             <a:endParaRPr lang="en-US" dirty="0"/>
           </a:p>
@@ -1224,7 +1580,7 @@
           <a:p>
             <a:r>
               <a:rPr lang="en-US" dirty="0"/>
-              <a:t>If she wants it in tomorrow's deck: doable only with the go-ahead now, and say plainly that a result built this afternoon has had no audit pass — the last unaudited number that reached a deck is slide 01's correction. February moves 22 of 239 filters between conventions, so name the calendar on every seasonal number.</a:t>
+              <a:t>If she wants it in tomorrow's deck: doable only with the go-ahead now — and say plainly that a result built this afternoon has had no audit pass; the last unaudited number that reached a deck is slide 01's correction. February moves 22 of 239 filters between conventions (dry_feb headline, belg_feb sensitivity) — name the calendar on every seasonal number.</a:t>
             </a:r>
             <a:endParaRPr lang="en-US" dirty="0"/>
           </a:p>
@@ -1576,7 +1932,8 @@
           <a:p>
             <a:r>
               <a:rPr lang="en-US" dirty="0"/>
-              <a:t>Frame it as the check working, not as damage. The number came in through the summary and propagated outward; no executed notebook ever produced it — that is the signature to watch for. If she asks what else changed: VIP flagged uncorroborated and pulled, the −1.61/−1.62 fix, ETBI vs Dry median 43.2, and the 91% line qualified as one filter.</a:t>
+              <a:t>SAY: Before anything else — the audit found a wrong claim in the deck and it is fixed. We had been saying the low-OC/EC cohort beats ten random cohorts on the held-out TOR test. There were five, not ten. The range was 3.1 to 5.0, not 4.4 to 7.3. And one of the five actually beat ours — you can see it in red. Worse than any of that, the comparison was structurally meaningless: each cohort was scored on its own disjoint-site split, so those RMSEs were never comparable in the first place. The conclusion survives on the like-for-like evidence — same 190 Addis filters, RMSE 1.16 against 1.48 to 2.24; held-out TOR R-squared 0.911 against 0.594 to 0.775. That is what the deck, the summary and the email now say. Fixed and pushed this morning.
+IF SHE PUSHES on how it got in: the number came in through the summary and propagated outward. No executed notebook ever produced it — that is the signature to watch for: a claim with no cell behind it. Frame the whole slide as the check working, not as damage.</a:t>
             </a:r>
             <a:endParaRPr lang="en-US" dirty="0"/>
           </a:p>
@@ -1752,7 +2109,7 @@
           <a:p>
             <a:r>
               <a:rPr lang="en-US" dirty="0"/>
-              <a:t>Also quick — context for the setup matrix. The random-cohort caveat from slide 01 does not change this ranking; the like-for-like tests do the work now.</a:t>
+              <a:t>Quick — context for the setup matrix. The random-cohort correction does not change this ranking; the like-for-like tests do the work now.</a:t>
             </a:r>
             <a:endParaRPr lang="en-US" dirty="0"/>
           </a:p>
@@ -1840,7 +2197,7 @@
           <a:p>
             <a:r>
               <a:rPr lang="en-US" dirty="0"/>
-              <a:t>One tone call for tomorrow lives on this slide: MAC 10 is where the corrected model “lands closest” — deliberately not “self-consistent”, because 0.86 fails ftir_19's own |slope−1| ≤ 0.1 bar while the raw models at MAC 6 pass it.</a:t>
+              <a:t>This is what she is approving for tomorrow, structurally. The two tone calls live here and on the component-selection slide of the Satoshi deck: the Calibration-app framing (“different question, not wrong tool”) and how hard to push MAC 10.</a:t>
             </a:r>
             <a:endParaRPr lang="en-US" dirty="0"/>
           </a:p>
@@ -1928,7 +2285,7 @@
           <a:p>
             <a:r>
               <a:rPr lang="en-US" dirty="0"/>
-              <a:t>She has seen these; keep it to the mechanism sentence: a raw-spectra model is free to regress on background, Addis rides a higher background than anything it was trained on, and that error lands as an offset. Honest cost: corrected R² 0.66 vs 0.77 raw and RMSE 2.41 vs 1.16 — we prefer it for its residual structure, not its fit.</a:t>
+              <a:t>She has seen these; keep to the mechanism sentence: a raw-spectra model is free to regress on background, Addis rides a higher background than anything it was trained on, and that error lands as an offset. Honest cost: corrected R² 0.66 vs 0.77 raw and RMSE 2.41 vs 1.16 — we prefer it for its residual structure, not its fit.</a:t>
             </a:r>
             <a:endParaRPr lang="en-US" dirty="0"/>
           </a:p>
@@ -2016,7 +2373,7 @@
           <a:p>
             <a:r>
               <a:rPr lang="en-US" dirty="0"/>
-              <a:t>This is the uncertainty evidence the July meeting never saw. It is the statistical backbone under the intercept work — and the natural bridge into restating that remainder as a physical target, which is the next slide.</a:t>
+              <a:t>This is the uncertainty evidence the July meeting never saw — the statistical backbone under the intercept work, and the bridge into restating that remainder as a physical target on slide 08.</a:t>
             </a:r>
             <a:endParaRPr lang="en-US" dirty="0"/>
           </a:p>
@@ -2104,7 +2461,7 @@
           <a:p>
             <a:r>
               <a:rPr lang="en-US" dirty="0"/>
-              <a:t>Ironically this is the slide that most directly answered her “I'm confused” moment in July. A constant offset that does not grow with extrapolation distance is not a domain failure — it behaves like something additive sitting in the x-axis data.</a:t>
+              <a:t>Ironically the slide that most directly answered her July “I'm confused” moment. A constant offset that does not grow with extrapolation distance is not a domain failure — it behaves like something additive sitting in the x-axis data.</a:t>
             </a:r>
             <a:endParaRPr lang="en-US" dirty="0"/>
           </a:p>
@@ -2752,7 +3109,7 @@
               <a:buNone/>
             </a:pPr>
             <a:r>
-              <a:rPr lang="en-US" sz="2700" b="1" dirty="0">
+              <a:rPr lang="en-US" sz="2600" b="1" dirty="0">
                 <a:solidFill>
                   <a:srgbClr val="1A1D21"/>
                 </a:solidFill>
@@ -2762,7 +3119,7 @@
               </a:rPr>
               <a:t>~21 Mm⁻¹ of absorption with no FTIR-EC behind it — and no modelling choice moves it.</a:t>
             </a:r>
-            <a:endParaRPr lang="en-US" sz="2700" dirty="0"/>
+            <a:endParaRPr lang="en-US" sz="2600" dirty="0"/>
           </a:p>
         </p:txBody>
       </p:sp>
@@ -2781,7 +3138,7 @@
           </p:nvPr>
         </p:nvGraphicFramePr>
         <p:xfrm>
-          <a:off x="502920" y="1691640"/>
+          <a:off x="502920" y="1737360"/>
           <a:ext cx="6675120" cy="914400"/>
         </p:xfrm>
         <a:graphic>
@@ -2794,7 +3151,7 @@
                 <a:gridCol w="1097280"/>
                 <a:gridCol w="1188720"/>
               </a:tblGrid>
-              <a:tr h="347472">
+              <a:tr h="384048">
                 <a:tc>
                   <a:txBody>
                     <a:bodyPr/>
@@ -3068,7 +3425,7 @@
                   </a:tcPr>
                 </a:tc>
               </a:tr>
-              <a:tr h="347472">
+              <a:tr h="384048">
                 <a:tc>
                   <a:txBody>
                     <a:bodyPr/>
@@ -3342,7 +3699,7 @@
                   </a:tcPr>
                 </a:tc>
               </a:tr>
-              <a:tr h="347472">
+              <a:tr h="384048">
                 <a:tc>
                   <a:txBody>
                     <a:bodyPr/>
@@ -3616,7 +3973,7 @@
                   </a:tcPr>
                 </a:tc>
               </a:tr>
-              <a:tr h="347472">
+              <a:tr h="384048">
                 <a:tc>
                   <a:txBody>
                     <a:bodyPr/>
@@ -3890,7 +4247,7 @@
                   </a:tcPr>
                 </a:tc>
               </a:tr>
-              <a:tr h="347472">
+              <a:tr h="384048">
                 <a:tc>
                   <a:txBody>
                     <a:bodyPr/>
@@ -4164,7 +4521,7 @@
                   </a:tcPr>
                 </a:tc>
               </a:tr>
-              <a:tr h="347472">
+              <a:tr h="384048">
                 <a:tc>
                   <a:txBody>
                     <a:bodyPr/>
@@ -4438,7 +4795,7 @@
                   </a:tcPr>
                 </a:tc>
               </a:tr>
-              <a:tr h="347472">
+              <a:tr h="384048">
                 <a:tc>
                   <a:txBody>
                     <a:bodyPr/>
@@ -4724,12 +5081,12 @@
         </p:nvSpPr>
         <p:spPr>
           <a:xfrm>
-            <a:off x="7589520" y="1691640"/>
-            <a:ext cx="4069080" cy="2377440"/>
+            <a:off x="7589520" y="1737360"/>
+            <a:ext cx="4069080" cy="2743200"/>
           </a:xfrm>
           <a:prstGeom prst="roundRect">
             <a:avLst>
-              <a:gd name="adj" fmla="val 3077"/>
+              <a:gd name="adj" fmla="val 2667"/>
             </a:avLst>
           </a:prstGeom>
           <a:solidFill>
@@ -4751,7 +5108,7 @@
         </p:nvSpPr>
         <p:spPr>
           <a:xfrm>
-            <a:off x="7818120" y="1828800"/>
+            <a:off x="7818120" y="1874520"/>
             <a:ext cx="3566160" cy="914400"/>
           </a:xfrm>
           <a:prstGeom prst="rect">
@@ -4790,8 +5147,8 @@
         </p:nvSpPr>
         <p:spPr>
           <a:xfrm>
-            <a:off x="7818120" y="2743200"/>
-            <a:ext cx="3657600" cy="1280160"/>
+            <a:off x="7818120" y="2788920"/>
+            <a:ext cx="3657600" cy="1554480"/>
           </a:xfrm>
           <a:prstGeom prst="rect">
             <a:avLst/>
@@ -4815,7 +5172,7 @@
                 <a:ea typeface="Calibri" pitchFamily="34" charset="-122"/>
                 <a:cs typeface="Calibri" pitchFamily="34" charset="-120"/>
               </a:rPr>
-              <a:t>Mm⁻¹ median — 46% of a typical Addis filter's Fabs. Slopes span 3.4× across these six setups; C spans 1.4×. And C is exactly MAC-invariant, so the target survives the MAC fork.</a:t>
+              <a:t>Mm⁻¹ median — 46% of a typical Addis filter's Fabs. Slopes span 3.4× across these six setups; C spans 1.4×. Exactly MAC-invariant, so the target survives the MAC fork.</a:t>
             </a:r>
             <a:endParaRPr lang="en-US" sz="1200" dirty="0"/>
           </a:p>
@@ -4829,8 +5186,8 @@
         </p:nvSpPr>
         <p:spPr>
           <a:xfrm>
-            <a:off x="502920" y="4434840"/>
-            <a:ext cx="11155680" cy="1645920"/>
+            <a:off x="502920" y="4892040"/>
+            <a:ext cx="11155680" cy="1554480"/>
           </a:xfrm>
           <a:prstGeom prst="rect">
             <a:avLst/>
@@ -4979,7 +5336,7 @@
               <a:buNone/>
             </a:pPr>
             <a:r>
-              <a:rPr lang="en-US" sz="2700" b="1" dirty="0">
+              <a:rPr lang="en-US" sz="2600" b="1" dirty="0">
                 <a:solidFill>
                   <a:srgbClr val="1A1D21"/>
                 </a:solidFill>
@@ -4989,7 +5346,7 @@
               </a:rPr>
               <a:t>No. IMPROVE HIPS runs through the origin — which leaves two explanations that are not an absorber.</a:t>
             </a:r>
-            <a:endParaRPr lang="en-US" sz="2700" dirty="0"/>
+            <a:endParaRPr lang="en-US" sz="2600" dirty="0"/>
           </a:p>
         </p:txBody>
       </p:sp>
@@ -5001,12 +5358,12 @@
         </p:nvSpPr>
         <p:spPr>
           <a:xfrm>
-            <a:off x="502920" y="1691640"/>
-            <a:ext cx="3611880" cy="1325880"/>
+            <a:off x="502920" y="1645920"/>
+            <a:ext cx="3611880" cy="1188720"/>
           </a:xfrm>
           <a:prstGeom prst="roundRect">
             <a:avLst>
-              <a:gd name="adj" fmla="val 5517"/>
+              <a:gd name="adj" fmla="val 6154"/>
             </a:avLst>
           </a:prstGeom>
           <a:solidFill>
@@ -5028,8 +5385,8 @@
         </p:nvSpPr>
         <p:spPr>
           <a:xfrm>
-            <a:off x="685800" y="1801368"/>
-            <a:ext cx="3291840" cy="640080"/>
+            <a:off x="685800" y="1737360"/>
+            <a:ext cx="3291840" cy="566928"/>
           </a:xfrm>
           <a:prstGeom prst="rect">
             <a:avLst/>
@@ -5045,7 +5402,7 @@
               <a:buNone/>
             </a:pPr>
             <a:r>
-              <a:rPr lang="en-US" sz="2500" b="1" dirty="0">
+              <a:rPr lang="en-US" sz="2400" b="1" dirty="0">
                 <a:solidFill>
                   <a:srgbClr val="3F7A56"/>
                 </a:solidFill>
@@ -5055,7 +5412,7 @@
               </a:rPr>
               <a:t>≤ 1.3 Mm⁻¹</a:t>
             </a:r>
-            <a:endParaRPr lang="en-US" sz="2500" dirty="0"/>
+            <a:endParaRPr lang="en-US" sz="2400" dirty="0"/>
           </a:p>
         </p:txBody>
       </p:sp>
@@ -5067,8 +5424,8 @@
         </p:nvSpPr>
         <p:spPr>
           <a:xfrm>
-            <a:off x="685800" y="2441448"/>
-            <a:ext cx="3291840" cy="502920"/>
+            <a:off x="685800" y="2304288"/>
+            <a:ext cx="3291840" cy="457200"/>
           </a:xfrm>
           <a:prstGeom prst="rect">
             <a:avLst/>
@@ -5106,12 +5463,12 @@
         </p:nvSpPr>
         <p:spPr>
           <a:xfrm>
-            <a:off x="4325112" y="1691640"/>
-            <a:ext cx="3611880" cy="1325880"/>
+            <a:off x="4325112" y="1645920"/>
+            <a:ext cx="3611880" cy="1188720"/>
           </a:xfrm>
           <a:prstGeom prst="roundRect">
             <a:avLst>
-              <a:gd name="adj" fmla="val 5517"/>
+              <a:gd name="adj" fmla="val 6154"/>
             </a:avLst>
           </a:prstGeom>
           <a:solidFill>
@@ -5133,8 +5490,8 @@
         </p:nvSpPr>
         <p:spPr>
           <a:xfrm>
-            <a:off x="4507992" y="1801368"/>
-            <a:ext cx="3291840" cy="640080"/>
+            <a:off x="4507992" y="1737360"/>
+            <a:ext cx="3291840" cy="566928"/>
           </a:xfrm>
           <a:prstGeom prst="rect">
             <a:avLst/>
@@ -5150,7 +5507,7 @@
               <a:buNone/>
             </a:pPr>
             <a:r>
-              <a:rPr lang="en-US" sz="2500" b="1" dirty="0">
+              <a:rPr lang="en-US" sz="2400" b="1" dirty="0">
                 <a:solidFill>
                   <a:srgbClr val="3F7A56"/>
                 </a:solidFill>
@@ -5160,7 +5517,7 @@
               </a:rPr>
               <a:t>+0.12 Mm⁻¹</a:t>
             </a:r>
-            <a:endParaRPr lang="en-US" sz="2500" dirty="0"/>
+            <a:endParaRPr lang="en-US" sz="2400" dirty="0"/>
           </a:p>
         </p:txBody>
       </p:sp>
@@ -5172,8 +5529,8 @@
         </p:nvSpPr>
         <p:spPr>
           <a:xfrm>
-            <a:off x="4507992" y="2441448"/>
-            <a:ext cx="3291840" cy="502920"/>
+            <a:off x="4507992" y="2304288"/>
+            <a:ext cx="3291840" cy="457200"/>
           </a:xfrm>
           <a:prstGeom prst="rect">
             <a:avLst/>
@@ -5211,12 +5568,12 @@
         </p:nvSpPr>
         <p:spPr>
           <a:xfrm>
-            <a:off x="8147304" y="1691640"/>
-            <a:ext cx="3611880" cy="1325880"/>
+            <a:off x="8147304" y="1645920"/>
+            <a:ext cx="3611880" cy="1188720"/>
           </a:xfrm>
           <a:prstGeom prst="roundRect">
             <a:avLst>
-              <a:gd name="adj" fmla="val 5517"/>
+              <a:gd name="adj" fmla="val 6154"/>
             </a:avLst>
           </a:prstGeom>
           <a:solidFill>
@@ -5238,8 +5595,8 @@
         </p:nvSpPr>
         <p:spPr>
           <a:xfrm>
-            <a:off x="8330184" y="1801368"/>
-            <a:ext cx="3291840" cy="640080"/>
+            <a:off x="8330184" y="1737360"/>
+            <a:ext cx="3291840" cy="566928"/>
           </a:xfrm>
           <a:prstGeom prst="rect">
             <a:avLst/>
@@ -5255,7 +5612,7 @@
               <a:buNone/>
             </a:pPr>
             <a:r>
-              <a:rPr lang="en-US" sz="2500" b="1" dirty="0">
+              <a:rPr lang="en-US" sz="2400" b="1" dirty="0">
                 <a:solidFill>
                   <a:srgbClr val="2C6E9E"/>
                 </a:solidFill>
@@ -5265,7 +5622,7 @@
               </a:rPr>
               <a:t>0.010%</a:t>
             </a:r>
-            <a:endParaRPr lang="en-US" sz="2500" dirty="0"/>
+            <a:endParaRPr lang="en-US" sz="2400" dirty="0"/>
           </a:p>
         </p:txBody>
       </p:sp>
@@ -5277,8 +5634,8 @@
         </p:nvSpPr>
         <p:spPr>
           <a:xfrm>
-            <a:off x="8330184" y="2441448"/>
-            <a:ext cx="3291840" cy="502920"/>
+            <a:off x="8330184" y="2304288"/>
+            <a:ext cx="3291840" cy="457200"/>
           </a:xfrm>
           <a:prstGeom prst="rect">
             <a:avLst/>
@@ -5302,7 +5659,7 @@
                 <a:ea typeface="Calibri" pitchFamily="34" charset="-122"/>
                 <a:cs typeface="Calibri" pitchFamily="34" charset="-120"/>
               </a:rPr>
-              <a:t>IMPROVE filters reaching Addis's median 47.1</a:t>
+              <a:t>IMPROVE filters reaching Addis's 47.1</a:t>
             </a:r>
             <a:endParaRPr lang="en-US" sz="1100" dirty="0"/>
           </a:p>
@@ -5316,23 +5673,20 @@
         </p:nvSpPr>
         <p:spPr>
           <a:xfrm>
-            <a:off x="502920" y="3246120"/>
-            <a:ext cx="11155680" cy="3017520"/>
-          </a:xfrm>
-          <a:prstGeom prst="rect">
-            <a:avLst/>
-          </a:prstGeom>
-          <a:noFill/>
-          <a:ln/>
-        </p:spPr>
-        <p:txBody>
-          <a:bodyPr wrap="square" lIns="0" tIns="0" rIns="0" bIns="0" rtlCol="0" anchor="t"/>
-          <a:lstStyle/>
-          <a:p>
-            <a:pPr algn="l" indent="0" marL="0">
-              <a:spcAft>
-                <a:spcPts val="800"/>
-              </a:spcAft>
+            <a:off x="502920" y="3063240"/>
+            <a:ext cx="11155680" cy="685800"/>
+          </a:xfrm>
+          <a:prstGeom prst="rect">
+            <a:avLst/>
+          </a:prstGeom>
+          <a:noFill/>
+          <a:ln/>
+        </p:spPr>
+        <p:txBody>
+          <a:bodyPr wrap="square" lIns="0" tIns="0" rIns="0" bIns="0" rtlCol="0" anchor="ctr"/>
+          <a:lstStyle/>
+          <a:p>
+            <a:pPr indent="0" marL="0">
               <a:buNone/>
             </a:pPr>
             <a:r>
@@ -5344,19 +5698,65 @@
                 <a:ea typeface="Calibri" pitchFamily="34" charset="-122"/>
                 <a:cs typeface="Calibri" pitchFamily="34" charset="-120"/>
               </a:rPr>
-              <a:t>So the offset is Addis-specific: ≤ 6% of C is instrument-generic, and OLS is the maximum over all errors-in-variables fits, so the bound is hard. But two non-absorber explanations survive — hear them today, not tomorrow:</a:t>
+              <a:t>So the offset is Addis-specific: ≤ 6% of C is instrument-generic — and OLS is the maximum over all errors-in-variables fits, so the bound is hard. Two non-absorber explanations survive — hear them today, not tomorrow:</a:t>
             </a:r>
             <a:endParaRPr lang="en-US" sz="1250" dirty="0"/>
           </a:p>
-          <a:p>
-            <a:pPr algn="l" indent="0" marL="0">
-              <a:spcAft>
-                <a:spcPts val="800"/>
-              </a:spcAft>
-              <a:buNone/>
-            </a:pPr>
-            <a:r>
-              <a:rPr lang="en-US" sz="1250" dirty="0">
+        </p:txBody>
+      </p:sp>
+      <p:sp>
+        <p:nvSpPr>
+          <p:cNvPr id="14" name="Shape 12"/>
+          <p:cNvSpPr/>
+          <p:nvPr/>
+        </p:nvSpPr>
+        <p:spPr>
+          <a:xfrm>
+            <a:off x="502920" y="3840480"/>
+            <a:ext cx="5532120" cy="2514600"/>
+          </a:xfrm>
+          <a:prstGeom prst="roundRect">
+            <a:avLst>
+              <a:gd name="adj" fmla="val 2909"/>
+            </a:avLst>
+          </a:prstGeom>
+          <a:solidFill>
+            <a:srgbClr val="F4F5F3"/>
+          </a:solidFill>
+          <a:ln w="12700">
+            <a:solidFill>
+              <a:srgbClr val="DDE0DC"/>
+            </a:solidFill>
+            <a:prstDash val="solid"/>
+          </a:ln>
+        </p:spPr>
+      </p:sp>
+      <p:sp>
+        <p:nvSpPr>
+          <p:cNvPr id="15" name="Text 13"/>
+          <p:cNvSpPr/>
+          <p:nvPr/>
+        </p:nvSpPr>
+        <p:spPr>
+          <a:xfrm>
+            <a:off x="704088" y="3959352"/>
+            <a:ext cx="5120640" cy="365760"/>
+          </a:xfrm>
+          <a:prstGeom prst="rect">
+            <a:avLst/>
+          </a:prstGeom>
+          <a:noFill/>
+          <a:ln/>
+        </p:spPr>
+        <p:txBody>
+          <a:bodyPr wrap="square" lIns="0" tIns="0" rIns="0" bIns="0" rtlCol="0" anchor="ctr"/>
+          <a:lstStyle/>
+          <a:p>
+            <a:pPr indent="0" marL="0">
+              <a:buNone/>
+            </a:pPr>
+            <a:r>
+              <a:rPr lang="en-US" sz="1400" b="1" dirty="0">
                 <a:solidFill>
                   <a:srgbClr val="1A1D21"/>
                 </a:solidFill>
@@ -5364,19 +5764,104 @@
                 <a:ea typeface="Calibri" pitchFamily="34" charset="-122"/>
                 <a:cs typeface="Calibri" pitchFamily="34" charset="-120"/>
               </a:rPr>
-              <a:t>① Curve geometry. Fabs is concave in EC across IMPROVE (≈ EC^0.796, through zero) — a straight line through a concave cloud manufactures a negative intercept with no offset present. Per-site intercepts run at median 35% of site mean Fabs; Addis is 46%, and ~a third of IMPROVE sites sit at or above that in data whose true offset is ~0. (The exponent is an upper bound on concavity — binned on Fabs it comes out faintly convex — so this may be smaller than it looks.)</a:t>
-            </a:r>
-            <a:endParaRPr lang="en-US" sz="1250" dirty="0"/>
-          </a:p>
-          <a:p>
-            <a:pPr algn="l" indent="0" marL="0">
-              <a:spcAft>
-                <a:spcPts val="800"/>
-              </a:spcAft>
-              <a:buNone/>
-            </a:pPr>
-            <a:r>
-              <a:rPr lang="en-US" sz="1250" dirty="0">
+              <a:t>① Curve geometry</a:t>
+            </a:r>
+            <a:endParaRPr lang="en-US" sz="1400" dirty="0"/>
+          </a:p>
+        </p:txBody>
+      </p:sp>
+      <p:sp>
+        <p:nvSpPr>
+          <p:cNvPr id="16" name="Text 14"/>
+          <p:cNvSpPr/>
+          <p:nvPr/>
+        </p:nvSpPr>
+        <p:spPr>
+          <a:xfrm>
+            <a:off x="704088" y="4343400"/>
+            <a:ext cx="5166360" cy="1920240"/>
+          </a:xfrm>
+          <a:prstGeom prst="rect">
+            <a:avLst/>
+          </a:prstGeom>
+          <a:noFill/>
+          <a:ln/>
+        </p:spPr>
+        <p:txBody>
+          <a:bodyPr wrap="square" lIns="0" tIns="0" rIns="0" bIns="0" rtlCol="0" anchor="ctr"/>
+          <a:lstStyle/>
+          <a:p>
+            <a:pPr indent="0" marL="0">
+              <a:buNone/>
+            </a:pPr>
+            <a:r>
+              <a:rPr lang="en-US" sz="1080" dirty="0">
+                <a:solidFill>
+                  <a:srgbClr val="5E6369"/>
+                </a:solidFill>
+                <a:latin typeface="Calibri" pitchFamily="34" charset="0"/>
+                <a:ea typeface="Calibri" pitchFamily="34" charset="-122"/>
+                <a:cs typeface="Calibri" pitchFamily="34" charset="-120"/>
+              </a:rPr>
+              <a:t>Fabs is concave in EC across IMPROVE (≈ EC^0.796, through zero) — a straight line through a concave cloud manufactures a negative intercept with no offset present. Per-site intercepts: median 35% of site mean Fabs; Addis is 46%, and ~a third of sites sit at or above that in data whose true offset is ~0. Caveat: the exponent is an upper bound on concavity (Fabs-binned it comes out faintly convex), so this may be smaller than it looks.</a:t>
+            </a:r>
+            <a:endParaRPr lang="en-US" sz="1080" dirty="0"/>
+          </a:p>
+        </p:txBody>
+      </p:sp>
+      <p:sp>
+        <p:nvSpPr>
+          <p:cNvPr id="17" name="Shape 15"/>
+          <p:cNvSpPr/>
+          <p:nvPr/>
+        </p:nvSpPr>
+        <p:spPr>
+          <a:xfrm>
+            <a:off x="6263640" y="3840480"/>
+            <a:ext cx="5532120" cy="2514600"/>
+          </a:xfrm>
+          <a:prstGeom prst="roundRect">
+            <a:avLst>
+              <a:gd name="adj" fmla="val 2909"/>
+            </a:avLst>
+          </a:prstGeom>
+          <a:solidFill>
+            <a:srgbClr val="F4F5F3"/>
+          </a:solidFill>
+          <a:ln w="12700">
+            <a:solidFill>
+              <a:srgbClr val="DDE0DC"/>
+            </a:solidFill>
+            <a:prstDash val="solid"/>
+          </a:ln>
+        </p:spPr>
+      </p:sp>
+      <p:sp>
+        <p:nvSpPr>
+          <p:cNvPr id="18" name="Text 16"/>
+          <p:cNvSpPr/>
+          <p:nvPr/>
+        </p:nvSpPr>
+        <p:spPr>
+          <a:xfrm>
+            <a:off x="6464808" y="3959352"/>
+            <a:ext cx="5120640" cy="365760"/>
+          </a:xfrm>
+          <a:prstGeom prst="rect">
+            <a:avLst/>
+          </a:prstGeom>
+          <a:noFill/>
+          <a:ln/>
+        </p:spPr>
+        <p:txBody>
+          <a:bodyPr wrap="square" lIns="0" tIns="0" rIns="0" bIns="0" rtlCol="0" anchor="ctr"/>
+          <a:lstStyle/>
+          <a:p>
+            <a:pPr indent="0" marL="0">
+              <a:buNone/>
+            </a:pPr>
+            <a:r>
+              <a:rPr lang="en-US" sz="1400" b="1" dirty="0">
                 <a:solidFill>
                   <a:srgbClr val="1A1D21"/>
                 </a:solidFill>
@@ -5384,9 +5869,48 @@
                 <a:ea typeface="Calibri" pitchFamily="34" charset="-122"/>
                 <a:cs typeface="Calibri" pitchFamily="34" charset="-120"/>
               </a:rPr>
-              <a:t>② A loading-dependent HIPS artifact. IMPROVE median Fabs is 1.3 vs Addis 47 — a 37× gap that rules out an additive loading-independent offset but not one growing with loading: per-site intercept grows with loading (r = 0.69), extrapolating to 16.2 Mm⁻¹ ≈ 75% of C. That extrapolation is 6× beyond IMPROVE's largest site — it cannot be closed from IMPROVE data.</a:t>
-            </a:r>
-            <a:endParaRPr lang="en-US" sz="1250" dirty="0"/>
+              <a:t>② Loading-dependent HIPS artifact</a:t>
+            </a:r>
+            <a:endParaRPr lang="en-US" sz="1400" dirty="0"/>
+          </a:p>
+        </p:txBody>
+      </p:sp>
+      <p:sp>
+        <p:nvSpPr>
+          <p:cNvPr id="19" name="Text 17"/>
+          <p:cNvSpPr/>
+          <p:nvPr/>
+        </p:nvSpPr>
+        <p:spPr>
+          <a:xfrm>
+            <a:off x="6464808" y="4343400"/>
+            <a:ext cx="5166360" cy="1920240"/>
+          </a:xfrm>
+          <a:prstGeom prst="rect">
+            <a:avLst/>
+          </a:prstGeom>
+          <a:noFill/>
+          <a:ln/>
+        </p:spPr>
+        <p:txBody>
+          <a:bodyPr wrap="square" lIns="0" tIns="0" rIns="0" bIns="0" rtlCol="0" anchor="ctr"/>
+          <a:lstStyle/>
+          <a:p>
+            <a:pPr indent="0" marL="0">
+              <a:buNone/>
+            </a:pPr>
+            <a:r>
+              <a:rPr lang="en-US" sz="1080" dirty="0">
+                <a:solidFill>
+                  <a:srgbClr val="5E6369"/>
+                </a:solidFill>
+                <a:latin typeface="Calibri" pitchFamily="34" charset="0"/>
+                <a:ea typeface="Calibri" pitchFamily="34" charset="-122"/>
+                <a:cs typeface="Calibri" pitchFamily="34" charset="-120"/>
+              </a:rPr>
+              <a:t>IMPROVE median Fabs 1.3 vs Addis 47 — a 37× gap that rules out an additive loading-independent offset, but not one growing with loading: per-site intercept grows with loading (r = 0.69), extrapolating to 16.2 Mm⁻¹ ≈ 75% of C. That extrapolation is 6× beyond IMPROVE's largest site — it cannot be closed from IMPROVE data.</a:t>
+            </a:r>
+            <a:endParaRPr lang="en-US" sz="1080" dirty="0"/>
           </a:p>
         </p:txBody>
       </p:sp>
@@ -5486,7 +6010,7 @@
               <a:buNone/>
             </a:pPr>
             <a:r>
-              <a:rPr lang="en-US" sz="2700" b="1" dirty="0">
+              <a:rPr lang="en-US" sz="2600" b="1" dirty="0">
                 <a:solidFill>
                   <a:srgbClr val="1A1D21"/>
                 </a:solidFill>
@@ -5496,7 +6020,7 @@
               </a:rPr>
               <a:t>Both ChemSpec carbon columns are circular — BC with Fabs, EC with our own FTIR-EC.</a:t>
             </a:r>
-            <a:endParaRPr lang="en-US" sz="2700" dirty="0"/>
+            <a:endParaRPr lang="en-US" sz="2600" dirty="0"/>
           </a:p>
         </p:txBody>
       </p:sp>
@@ -5509,11 +6033,11 @@
         <p:spPr>
           <a:xfrm>
             <a:off x="502920" y="1737360"/>
-            <a:ext cx="5532120" cy="2286000"/>
+            <a:ext cx="5532120" cy="1828800"/>
           </a:xfrm>
           <a:prstGeom prst="roundRect">
             <a:avLst>
-              <a:gd name="adj" fmla="val 3200"/>
+              <a:gd name="adj" fmla="val 4000"/>
             </a:avLst>
           </a:prstGeom>
           <a:solidFill>
@@ -5535,8 +6059,8 @@
         </p:nvSpPr>
         <p:spPr>
           <a:xfrm>
-            <a:off x="731520" y="1874520"/>
-            <a:ext cx="5120640" cy="457200"/>
+            <a:off x="731520" y="1856232"/>
+            <a:ext cx="5120640" cy="384048"/>
           </a:xfrm>
           <a:prstGeom prst="rect">
             <a:avLst/>
@@ -5552,7 +6076,7 @@
               <a:buNone/>
             </a:pPr>
             <a:r>
-              <a:rPr lang="en-US" sz="1700" b="1" dirty="0">
+              <a:rPr lang="en-US" sz="1600" b="1" dirty="0">
                 <a:solidFill>
                   <a:srgbClr val="B23327"/>
                 </a:solidFill>
@@ -5566,7 +6090,7 @@
               <a:buNone/>
             </a:pPr>
             <a:r>
-              <a:rPr lang="en-US" sz="1500" dirty="0">
+              <a:rPr lang="en-US" sz="1400" dirty="0">
                 <a:solidFill>
                   <a:srgbClr val="1A1D21"/>
                 </a:solidFill>
@@ -5576,7 +6100,7 @@
               </a:rPr>
               <a:t>= round(Fabs/10, 2)</a:t>
             </a:r>
-            <a:endParaRPr lang="en-US" sz="1700" dirty="0"/>
+            <a:endParaRPr lang="en-US" sz="1600" dirty="0"/>
           </a:p>
         </p:txBody>
       </p:sp>
@@ -5588,8 +6112,8 @@
         </p:nvSpPr>
         <p:spPr>
           <a:xfrm>
-            <a:off x="731520" y="2377440"/>
-            <a:ext cx="5120640" cy="1463040"/>
+            <a:off x="731520" y="2267712"/>
+            <a:ext cx="5120640" cy="1234440"/>
           </a:xfrm>
           <a:prstGeom prst="rect">
             <a:avLst/>
@@ -5605,7 +6129,7 @@
               <a:buNone/>
             </a:pPr>
             <a:r>
-              <a:rPr lang="en-US" sz="1200" dirty="0">
+              <a:rPr lang="en-US" sz="1150" dirty="0">
                 <a:solidFill>
                   <a:srgbClr val="5E6369"/>
                 </a:solidFill>
@@ -5615,7 +6139,7 @@
               </a:rPr>
               <a:t>bit-for-bit on 163/188 ETAD filters; 23 of 25 SPARTAN sites give a BC slope within 1% of 10. Circular with the x-axis.</a:t>
             </a:r>
-            <a:endParaRPr lang="en-US" sz="1200" dirty="0"/>
+            <a:endParaRPr lang="en-US" sz="1150" dirty="0"/>
           </a:p>
         </p:txBody>
       </p:sp>
@@ -5628,11 +6152,11 @@
         <p:spPr>
           <a:xfrm>
             <a:off x="6263640" y="1737360"/>
-            <a:ext cx="5532120" cy="2286000"/>
+            <a:ext cx="5532120" cy="1828800"/>
           </a:xfrm>
           <a:prstGeom prst="roundRect">
             <a:avLst>
-              <a:gd name="adj" fmla="val 3200"/>
+              <a:gd name="adj" fmla="val 4000"/>
             </a:avLst>
           </a:prstGeom>
           <a:solidFill>
@@ -5654,8 +6178,8 @@
         </p:nvSpPr>
         <p:spPr>
           <a:xfrm>
-            <a:off x="6492240" y="1874520"/>
-            <a:ext cx="5120640" cy="457200"/>
+            <a:off x="6492240" y="1856232"/>
+            <a:ext cx="5120640" cy="384048"/>
           </a:xfrm>
           <a:prstGeom prst="rect">
             <a:avLst/>
@@ -5671,7 +6195,7 @@
               <a:buNone/>
             </a:pPr>
             <a:r>
-              <a:rPr lang="en-US" sz="1700" b="1" dirty="0">
+              <a:rPr lang="en-US" sz="1600" b="1" dirty="0">
                 <a:solidFill>
                   <a:srgbClr val="7A4FA3"/>
                 </a:solidFill>
@@ -5685,7 +6209,7 @@
               <a:buNone/>
             </a:pPr>
             <a:r>
-              <a:rPr lang="en-US" sz="1500" dirty="0">
+              <a:rPr lang="en-US" sz="1400" dirty="0">
                 <a:solidFill>
                   <a:srgbClr val="1A1D21"/>
                 </a:solidFill>
@@ -5695,7 +6219,7 @@
               </a:rPr>
               <a:t>= EC_ftir, rounded</a:t>
             </a:r>
-            <a:endParaRPr lang="en-US" sz="1700" dirty="0"/>
+            <a:endParaRPr lang="en-US" sz="1600" dirty="0"/>
           </a:p>
         </p:txBody>
       </p:sp>
@@ -5707,8 +6231,8 @@
         </p:nvSpPr>
         <p:spPr>
           <a:xfrm>
-            <a:off x="6492240" y="2377440"/>
-            <a:ext cx="5120640" cy="1463040"/>
+            <a:off x="6492240" y="2267712"/>
+            <a:ext cx="5120640" cy="1234440"/>
           </a:xfrm>
           <a:prstGeom prst="rect">
             <a:avLst/>
@@ -5724,7 +6248,7 @@
               <a:buNone/>
             </a:pPr>
             <a:r>
-              <a:rPr lang="en-US" sz="1200" dirty="0">
+              <a:rPr lang="en-US" sz="1150" dirty="0">
                 <a:solidFill>
                   <a:srgbClr val="5E6369"/>
                 </a:solidFill>
@@ -5734,7 +6258,7 @@
               </a:rPr>
               <a:t>r² = 0.9997, ratio median 1.0000, median |Δ| = 0.0030 µg/m³ — exactly the 2-dp rounding half-width; exact on 164/175. Circular with the y-axis.</a:t>
             </a:r>
-            <a:endParaRPr lang="en-US" sz="1200" dirty="0"/>
+            <a:endParaRPr lang="en-US" sz="1150" dirty="0"/>
           </a:p>
         </p:txBody>
       </p:sp>
@@ -5746,8 +6270,8 @@
         </p:nvSpPr>
         <p:spPr>
           <a:xfrm>
-            <a:off x="502920" y="4297680"/>
-            <a:ext cx="11155680" cy="1737360"/>
+            <a:off x="502920" y="3931920"/>
+            <a:ext cx="11155680" cy="1554480"/>
           </a:xfrm>
           <a:prstGeom prst="rect">
             <a:avLst/>
@@ -5808,7 +6332,7 @@
         </p:nvSpPr>
         <p:spPr>
           <a:xfrm>
-            <a:off x="502920" y="6035040"/>
+            <a:off x="502920" y="5760720"/>
             <a:ext cx="3470148" cy="384048"/>
           </a:xfrm>
           <a:prstGeom prst="roundRect">
@@ -5835,7 +6359,7 @@
         </p:nvSpPr>
         <p:spPr>
           <a:xfrm>
-            <a:off x="576072" y="6035040"/>
+            <a:off x="576072" y="5760720"/>
             <a:ext cx="3378708" cy="384048"/>
           </a:xfrm>
           <a:prstGeom prst="rect">
@@ -5888,7 +6412,7 @@
         </p:nvSpPr>
         <p:spPr>
           <a:xfrm>
-            <a:off x="4137660" y="6035040"/>
+            <a:off x="4137660" y="5760720"/>
             <a:ext cx="3941064" cy="384048"/>
           </a:xfrm>
           <a:prstGeom prst="roundRect">
@@ -5915,7 +6439,7 @@
         </p:nvSpPr>
         <p:spPr>
           <a:xfrm>
-            <a:off x="4210812" y="6035040"/>
+            <a:off x="4210812" y="5760720"/>
             <a:ext cx="3849624" cy="384048"/>
           </a:xfrm>
           <a:prstGeom prst="rect">
@@ -6056,7 +6580,7 @@
               <a:buNone/>
             </a:pPr>
             <a:r>
-              <a:rPr lang="en-US" sz="2700" b="1" dirty="0">
+              <a:rPr lang="en-US" sz="2600" b="1" dirty="0">
                 <a:solidFill>
                   <a:srgbClr val="1A1D21"/>
                 </a:solidFill>
@@ -6066,7 +6590,7 @@
               </a:rPr>
               <a:t>HIPS is the He–Ne line: 632.8 ≈ 633 nm — and MAC 10 belongs to 633.</a:t>
             </a:r>
-            <a:endParaRPr lang="en-US" sz="2700" dirty="0"/>
+            <a:endParaRPr lang="en-US" sz="2600" dirty="0"/>
           </a:p>
         </p:txBody>
       </p:sp>
@@ -6079,11 +6603,11 @@
         <p:spPr>
           <a:xfrm>
             <a:off x="502920" y="1691640"/>
-            <a:ext cx="3383280" cy="2286000"/>
+            <a:ext cx="3383280" cy="4023360"/>
           </a:xfrm>
           <a:prstGeom prst="roundRect">
             <a:avLst>
-              <a:gd name="adj" fmla="val 3200"/>
+              <a:gd name="adj" fmla="val 2162"/>
             </a:avLst>
           </a:prstGeom>
           <a:solidFill>
@@ -6100,7 +6624,7 @@
         </p:nvSpPr>
         <p:spPr>
           <a:xfrm>
-            <a:off x="731520" y="1828800"/>
+            <a:off x="731520" y="1920240"/>
             <a:ext cx="2926080" cy="1188720"/>
           </a:xfrm>
           <a:prstGeom prst="rect">
@@ -6139,8 +6663,8 @@
         </p:nvSpPr>
         <p:spPr>
           <a:xfrm>
-            <a:off x="731520" y="3063240"/>
-            <a:ext cx="2926080" cy="777240"/>
+            <a:off x="731520" y="3200400"/>
+            <a:ext cx="2926080" cy="822960"/>
           </a:xfrm>
           <a:prstGeom prst="rect">
             <a:avLst/>
@@ -6164,10 +6688,27 @@
                 <a:ea typeface="Calibri" pitchFamily="34" charset="-122"/>
                 <a:cs typeface="Calibri" pitchFamily="34" charset="-120"/>
               </a:rPr>
-              <a:t>nm — He–Ne 632.8, rounded. MAC = 10 m²/g at 633.</a:t>
+              <a:t>nm — He–Ne 632.8, rounded.</a:t>
             </a:r>
             <a:endParaRPr lang="en-US" sz="1300" dirty="0"/>
           </a:p>
+          <a:p>
+            <a:pPr indent="0" marL="0">
+              <a:buNone/>
+            </a:pPr>
+            <a:r>
+              <a:rPr lang="en-US" sz="1300" dirty="0">
+                <a:solidFill>
+                  <a:srgbClr val="CADCFC"/>
+                </a:solidFill>
+                <a:latin typeface="Calibri" pitchFamily="34" charset="0"/>
+                <a:ea typeface="Calibri" pitchFamily="34" charset="-122"/>
+                <a:cs typeface="Calibri" pitchFamily="34" charset="-120"/>
+              </a:rPr>
+              <a:t>MAC = 10 m²/g at 633.</a:t>
+            </a:r>
+            <a:endParaRPr lang="en-US" sz="1300" dirty="0"/>
+          </a:p>
         </p:txBody>
       </p:sp>
       <p:sp>
@@ -6178,8 +6719,47 @@
         </p:nvSpPr>
         <p:spPr>
           <a:xfrm>
+            <a:off x="731520" y="4343400"/>
+            <a:ext cx="2926080" cy="1188720"/>
+          </a:xfrm>
+          <a:prstGeom prst="rect">
+            <a:avLst/>
+          </a:prstGeom>
+          <a:noFill/>
+          <a:ln/>
+        </p:spPr>
+        <p:txBody>
+          <a:bodyPr wrap="square" lIns="0" tIns="0" rIns="0" bIns="0" rtlCol="0" anchor="ctr"/>
+          <a:lstStyle/>
+          <a:p>
+            <a:pPr indent="0" marL="0">
+              <a:buNone/>
+            </a:pPr>
+            <a:r>
+              <a:rPr lang="en-US" sz="1100" dirty="0">
+                <a:solidFill>
+                  <a:srgbClr val="767C83"/>
+                </a:solidFill>
+                <a:latin typeface="Calibri" pitchFamily="34" charset="0"/>
+                <a:ea typeface="Calibri" pitchFamily="34" charset="-122"/>
+                <a:cs typeface="Calibri" pitchFamily="34" charset="-120"/>
+              </a:rPr>
+              <a:t>Corrected in this commit: the 405 nm premise in RESEARCH_PROGRESS · both OPEN cells in the optics reference · the one-pager's hedges.</a:t>
+            </a:r>
+            <a:endParaRPr lang="en-US" sz="1100" dirty="0"/>
+          </a:p>
+        </p:txBody>
+      </p:sp>
+      <p:sp>
+        <p:nvSpPr>
+          <p:cNvPr id="8" name="Text 6"/>
+          <p:cNvSpPr/>
+          <p:nvPr/>
+        </p:nvSpPr>
+        <p:spPr>
+          <a:xfrm>
             <a:off x="4206240" y="1691640"/>
-            <a:ext cx="7498080" cy="4206240"/>
+            <a:ext cx="7498080" cy="3657600"/>
           </a:xfrm>
           <a:prstGeom prst="rect">
             <a:avLst/>
@@ -6226,7 +6806,7 @@
                 <a:ea typeface="Calibri" pitchFamily="34" charset="-122"/>
                 <a:cs typeface="Calibri" pitchFamily="34" charset="-120"/>
               </a:rPr>
-              <a:t>Consequences: the 405 nm premise in RESEARCH_PROGRESS was wrong and is corrected — so the AERONET dust null was aimed at the right wavelength after all, and dust absorbs less at 633 than 405, so that null strengthens and narrows “real non-EC absorption” toward brown carbon. And classic BrC absorbs weakly at 633 — so the non-absorber explanations gain weight correspondingly. The headline ask is untouched: quartz TOR separates the survivors at any wavelength.</a:t>
+              <a:t>Consequences: the AERONET dust null was aimed at the right wavelength after all — and dust absorbs less at 633 than 405, so it strengthens and narrows “real non-EC absorption” toward brown carbon. Classic BrC absorbs weakly at 633, so the non-absorber explanations gain weight correspondingly. The headline ask is untouched: quartz TOR separates the survivors at any wavelength.</a:t>
             </a:r>
             <a:endParaRPr lang="en-US" sz="1250" dirty="0"/>
           </a:p>
@@ -6246,7 +6826,7 @@
                 <a:ea typeface="Calibri" pitchFamily="34" charset="-122"/>
                 <a:cs typeface="Calibri" pitchFamily="34" charset="-120"/>
               </a:rPr>
-              <a:t>Remaining question — semantics, not existence: HIPS_Uncertainty exists as its own parameter row (190/190, median 2.91 Mm⁻¹ = 6.2% of Fabs → Deming λ* ≈ 3, and λ = 1 overstates the EIV intercept correction by ~55%). Is that field counting statistics, repeatability, or propagated calibration uncertainty?</a:t>
+              <a:t>Remaining question — semantics, not existence: HIPS_Uncertainty exists as its own parameter row (190/190, median 2.91 Mm⁻¹ = 6.2% of Fabs → Deming λ* ≈ 3; λ = 1 overstates the EIV intercept correction by ~55%). Is that field counting statistics, repeatability, or propagated calibration uncertainty?</a:t>
             </a:r>
             <a:endParaRPr lang="en-US" sz="1250" dirty="0"/>
           </a:p>
@@ -6254,13 +6834,13 @@
       </p:sp>
       <p:sp>
         <p:nvSpPr>
-          <p:cNvPr id="8" name="Shape 6"/>
-          <p:cNvSpPr/>
-          <p:nvPr/>
-        </p:nvSpPr>
-        <p:spPr>
-          <a:xfrm>
-            <a:off x="502920" y="6035040"/>
+          <p:cNvPr id="9" name="Shape 7"/>
+          <p:cNvSpPr/>
+          <p:nvPr/>
+        </p:nvSpPr>
+        <p:spPr>
+          <a:xfrm>
+            <a:off x="4206240" y="5623560"/>
             <a:ext cx="1997964" cy="384048"/>
           </a:xfrm>
           <a:prstGeom prst="roundRect">
@@ -6281,13 +6861,13 @@
       </p:sp>
       <p:sp>
         <p:nvSpPr>
-          <p:cNvPr id="9" name="Text 7"/>
-          <p:cNvSpPr/>
-          <p:nvPr/>
-        </p:nvSpPr>
-        <p:spPr>
-          <a:xfrm>
-            <a:off x="576072" y="6035040"/>
+          <p:cNvPr id="10" name="Text 8"/>
+          <p:cNvSpPr/>
+          <p:nvPr/>
+        </p:nvSpPr>
+        <p:spPr>
+          <a:xfrm>
+            <a:off x="4279392" y="5623560"/>
             <a:ext cx="1906524" cy="384048"/>
           </a:xfrm>
           <a:prstGeom prst="rect">
@@ -6334,13 +6914,13 @@
       </p:sp>
       <p:sp>
         <p:nvSpPr>
-          <p:cNvPr id="10" name="Shape 8"/>
-          <p:cNvSpPr/>
-          <p:nvPr/>
-        </p:nvSpPr>
-        <p:spPr>
-          <a:xfrm>
-            <a:off x="2665476" y="6035040"/>
+          <p:cNvPr id="11" name="Shape 9"/>
+          <p:cNvSpPr/>
+          <p:nvPr/>
+        </p:nvSpPr>
+        <p:spPr>
+          <a:xfrm>
+            <a:off x="6368796" y="5623560"/>
             <a:ext cx="1568196" cy="384048"/>
           </a:xfrm>
           <a:prstGeom prst="roundRect">
@@ -6361,13 +6941,13 @@
       </p:sp>
       <p:sp>
         <p:nvSpPr>
-          <p:cNvPr id="11" name="Text 9"/>
-          <p:cNvSpPr/>
-          <p:nvPr/>
-        </p:nvSpPr>
-        <p:spPr>
-          <a:xfrm>
-            <a:off x="2738628" y="6035040"/>
+          <p:cNvPr id="12" name="Text 10"/>
+          <p:cNvSpPr/>
+          <p:nvPr/>
+        </p:nvSpPr>
+        <p:spPr>
+          <a:xfrm>
+            <a:off x="6441948" y="5623560"/>
             <a:ext cx="1476756" cy="384048"/>
           </a:xfrm>
           <a:prstGeom prst="rect">
@@ -6414,13 +6994,13 @@
       </p:sp>
       <p:sp>
         <p:nvSpPr>
-          <p:cNvPr id="12" name="Shape 10"/>
-          <p:cNvSpPr/>
-          <p:nvPr/>
-        </p:nvSpPr>
-        <p:spPr>
-          <a:xfrm>
-            <a:off x="4398264" y="6035040"/>
+          <p:cNvPr id="13" name="Shape 11"/>
+          <p:cNvSpPr/>
+          <p:nvPr/>
+        </p:nvSpPr>
+        <p:spPr>
+          <a:xfrm>
+            <a:off x="8101584" y="5623560"/>
             <a:ext cx="2596896" cy="384048"/>
           </a:xfrm>
           <a:prstGeom prst="roundRect">
@@ -6441,13 +7021,13 @@
       </p:sp>
       <p:sp>
         <p:nvSpPr>
-          <p:cNvPr id="13" name="Text 11"/>
-          <p:cNvSpPr/>
-          <p:nvPr/>
-        </p:nvSpPr>
-        <p:spPr>
-          <a:xfrm>
-            <a:off x="4471416" y="6035040"/>
+          <p:cNvPr id="14" name="Text 12"/>
+          <p:cNvSpPr/>
+          <p:nvPr/>
+        </p:nvSpPr>
+        <p:spPr>
+          <a:xfrm>
+            <a:off x="8174736" y="5623560"/>
             <a:ext cx="2505456" cy="384048"/>
           </a:xfrm>
           <a:prstGeom prst="rect">
@@ -6494,13 +7074,13 @@
       </p:sp>
       <p:sp>
         <p:nvSpPr>
-          <p:cNvPr id="14" name="Shape 12"/>
-          <p:cNvSpPr/>
-          <p:nvPr/>
-        </p:nvSpPr>
-        <p:spPr>
-          <a:xfrm>
-            <a:off x="7159752" y="6035040"/>
+          <p:cNvPr id="15" name="Shape 13"/>
+          <p:cNvSpPr/>
+          <p:nvPr/>
+        </p:nvSpPr>
+        <p:spPr>
+          <a:xfrm>
+            <a:off x="10863072" y="5623560"/>
             <a:ext cx="1280160" cy="384048"/>
           </a:xfrm>
           <a:prstGeom prst="roundRect">
@@ -6521,13 +7101,13 @@
       </p:sp>
       <p:sp>
         <p:nvSpPr>
-          <p:cNvPr id="15" name="Text 13"/>
-          <p:cNvSpPr/>
-          <p:nvPr/>
-        </p:nvSpPr>
-        <p:spPr>
-          <a:xfrm>
-            <a:off x="7232904" y="6035040"/>
+          <p:cNvPr id="16" name="Text 14"/>
+          <p:cNvSpPr/>
+          <p:nvPr/>
+        </p:nvSpPr>
+        <p:spPr>
+          <a:xfrm>
+            <a:off x="10936224" y="5623560"/>
             <a:ext cx="1188720" cy="384048"/>
           </a:xfrm>
           <a:prstGeom prst="rect">
@@ -6668,7 +7248,7 @@
               <a:buNone/>
             </a:pPr>
             <a:r>
-              <a:rPr lang="en-US" sz="2700" b="1" dirty="0">
+              <a:rPr lang="en-US" sz="2600" b="1" dirty="0">
                 <a:solidFill>
                   <a:srgbClr val="1A1D21"/>
                 </a:solidFill>
@@ -6678,7 +7258,7 @@
               </a:rPr>
               <a:t>MAC cannot move any intercept — and the IMPROVE bridge puts MAC ≈ 10 at Addis-like composition.</a:t>
             </a:r>
-            <a:endParaRPr lang="en-US" sz="2700" dirty="0"/>
+            <a:endParaRPr lang="en-US" sz="2600" dirty="0"/>
           </a:p>
         </p:txBody>
       </p:sp>
@@ -6716,7 +7296,7 @@
       </p:sp>
       <p:pic>
         <p:nvPicPr>
-          <p:cNvPr id="5" name="Image 0" descr="/Users/ahmadjalil/github/aethmodular/research/ftir_ec_phase3/output/plots/deck/mac_slope_pivot.png">    </p:cNvPr>
+          <p:cNvPr id="5" name="Image 0" descr="/Users/ahmadjalil/github/aethmodular/research/ftir_ec_phase3/output/plots/deck/by_protocol/site_held_out/mac_slope_pivot.png">    </p:cNvPr>
           <p:cNvPicPr>
             <a:picLocks noChangeAspect="1"/>
           </p:cNvPicPr>
@@ -6745,8 +7325,8 @@
         </p:nvSpPr>
         <p:spPr>
           <a:xfrm>
-            <a:off x="594360" y="5541264"/>
-            <a:ext cx="5394960" cy="310896"/>
+            <a:off x="594360" y="5559552"/>
+            <a:ext cx="5394960" cy="292608"/>
           </a:xfrm>
           <a:prstGeom prst="rect">
             <a:avLst/>
@@ -6770,7 +7350,7 @@
                 <a:ea typeface="Courier New" pitchFamily="34" charset="-122"/>
                 <a:cs typeface="Courier New" pitchFamily="34" charset="-120"/>
               </a:rPr>
-              <a:t>ftir_19 · mac_slope_pivot   </a:t>
+              <a:t>by_protocol/site_held_out · mac_slope_pivot   </a:t>
             </a:r>
             <a:pPr indent="0" marL="0">
               <a:buNone/>
@@ -6853,8 +7433,8 @@
         </p:nvSpPr>
         <p:spPr>
           <a:xfrm>
-            <a:off x="6355080" y="5541264"/>
-            <a:ext cx="5394960" cy="310896"/>
+            <a:off x="6355080" y="5559552"/>
+            <a:ext cx="5394960" cy="292608"/>
           </a:xfrm>
           <a:prstGeom prst="rect">
             <a:avLst/>
@@ -7234,7 +7814,7 @@
               <a:buNone/>
             </a:pPr>
             <a:r>
-              <a:rPr lang="en-US" sz="2700" b="1" dirty="0">
+              <a:rPr lang="en-US" sz="2600" b="1" dirty="0">
                 <a:solidFill>
                   <a:srgbClr val="1A1D21"/>
                 </a:solidFill>
@@ -7244,7 +7824,7 @@
               </a:rPr>
               <a:t>Charring grows aromatic C=C at ~1600 — a process argument, not just a correlation.</a:t>
             </a:r>
-            <a:endParaRPr lang="en-US" sz="2700" dirty="0"/>
+            <a:endParaRPr lang="en-US" sz="2600" dirty="0"/>
           </a:p>
         </p:txBody>
       </p:sp>
@@ -7311,8 +7891,8 @@
         </p:nvSpPr>
         <p:spPr>
           <a:xfrm>
-            <a:off x="594360" y="5541264"/>
-            <a:ext cx="5394960" cy="310896"/>
+            <a:off x="594360" y="5559552"/>
+            <a:ext cx="5394960" cy="292608"/>
           </a:xfrm>
           <a:prstGeom prst="rect">
             <a:avLst/>
@@ -7390,7 +7970,7 @@
       </p:sp>
       <p:pic>
         <p:nvPicPr>
-          <p:cNvPr id="8" name="Image 1" descr="/private/tmp/claude-501/-Users-ahmadjalil-github-aethmodular/98af0981-a12c-4f18-82f4-663747dfdcd7/scratchpad/july17_p23-23.png">    </p:cNvPr>
+          <p:cNvPr id="8" name="Image 1" descr="/private/tmp/claude-501/-Users-ahmadjalil-github-aethmodular/98af0981-a12c-4f18-82f4-663747dfdcd7/scratchpad/july17_p23_crop.png">    </p:cNvPr>
           <p:cNvPicPr>
             <a:picLocks noChangeAspect="1"/>
           </p:cNvPicPr>
@@ -7419,8 +7999,8 @@
         </p:nvSpPr>
         <p:spPr>
           <a:xfrm>
-            <a:off x="6355080" y="5541264"/>
-            <a:ext cx="5394960" cy="310896"/>
+            <a:off x="6355080" y="5559552"/>
+            <a:ext cx="5394960" cy="292608"/>
           </a:xfrm>
           <a:prstGeom prst="rect">
             <a:avLst/>
@@ -7800,7 +8380,7 @@
               <a:buNone/>
             </a:pPr>
             <a:r>
-              <a:rPr lang="en-US" sz="2700" b="1" dirty="0">
+              <a:rPr lang="en-US" sz="2600" b="1" dirty="0">
                 <a:solidFill>
                   <a:srgbClr val="1A1D21"/>
                 </a:solidFill>
@@ -7810,7 +8390,7 @@
               </a:rPr>
               <a:t>A mixture component found with no season labels isolates the anomaly — and it is Oct–Feb.</a:t>
             </a:r>
-            <a:endParaRPr lang="en-US" sz="2700" dirty="0"/>
+            <a:endParaRPr lang="en-US" sz="2600" dirty="0"/>
           </a:p>
         </p:txBody>
       </p:sp>
@@ -7848,7 +8428,7 @@
       </p:sp>
       <p:pic>
         <p:nvPicPr>
-          <p:cNvPr id="5" name="Image 0" descr="/private/tmp/claude-501/-Users-ahmadjalil-github-aethmodular/98af0981-a12c-4f18-82f4-663747dfdcd7/scratchpad/july17_p30-30.png">    </p:cNvPr>
+          <p:cNvPr id="5" name="Image 0" descr="/private/tmp/claude-501/-Users-ahmadjalil-github-aethmodular/98af0981-a12c-4f18-82f4-663747dfdcd7/scratchpad/july17_p30_crop.png">    </p:cNvPr>
           <p:cNvPicPr>
             <a:picLocks noChangeAspect="1"/>
           </p:cNvPicPr>
@@ -7877,8 +8457,8 @@
         </p:nvSpPr>
         <p:spPr>
           <a:xfrm>
-            <a:off x="594360" y="5541264"/>
-            <a:ext cx="5394960" cy="310896"/>
+            <a:off x="594360" y="5559552"/>
+            <a:ext cx="5394960" cy="292608"/>
           </a:xfrm>
           <a:prstGeom prst="rect">
             <a:avLst/>
@@ -7956,7 +8536,7 @@
       </p:sp>
       <p:pic>
         <p:nvPicPr>
-          <p:cNvPr id="8" name="Image 1" descr="/private/tmp/claude-501/-Users-ahmadjalil-github-aethmodular/98af0981-a12c-4f18-82f4-663747dfdcd7/scratchpad/july17_p27-27.png">    </p:cNvPr>
+          <p:cNvPr id="8" name="Image 1" descr="/private/tmp/claude-501/-Users-ahmadjalil-github-aethmodular/98af0981-a12c-4f18-82f4-663747dfdcd7/scratchpad/july17_p27_crop.png">    </p:cNvPr>
           <p:cNvPicPr>
             <a:picLocks noChangeAspect="1"/>
           </p:cNvPicPr>
@@ -7985,8 +8565,8 @@
         </p:nvSpPr>
         <p:spPr>
           <a:xfrm>
-            <a:off x="6355080" y="5541264"/>
-            <a:ext cx="5394960" cy="310896"/>
+            <a:off x="6355080" y="5559552"/>
+            <a:ext cx="5394960" cy="292608"/>
           </a:xfrm>
           <a:prstGeom prst="rect">
             <a:avLst/>
@@ -8366,7 +8946,7 @@
               <a:buNone/>
             </a:pPr>
             <a:r>
-              <a:rPr lang="en-US" sz="2700" b="1" dirty="0">
+              <a:rPr lang="en-US" sz="2600" b="1" dirty="0">
                 <a:solidFill>
                   <a:srgbClr val="1A1D21"/>
                 </a:solidFill>
@@ -8376,7 +8956,7 @@
               </a:rPr>
               <a:t>“Dry is right, wet breaks” comes out inverted — and only for the raw model.</a:t>
             </a:r>
-            <a:endParaRPr lang="en-US" sz="2700" dirty="0"/>
+            <a:endParaRPr lang="en-US" sz="2600" dirty="0"/>
           </a:p>
         </p:txBody>
       </p:sp>
@@ -8443,8 +9023,8 @@
         </p:nvSpPr>
         <p:spPr>
           <a:xfrm>
-            <a:off x="5486400" y="5678424"/>
-            <a:ext cx="6126480" cy="310896"/>
+            <a:off x="5486400" y="5696712"/>
+            <a:ext cx="6126480" cy="292608"/>
           </a:xfrm>
           <a:prstGeom prst="rect">
             <a:avLst/>
@@ -8564,7 +9144,7 @@
                 <a:ea typeface="Calibri" pitchFamily="34" charset="-122"/>
                 <a:cs typeface="Calibri" pitchFamily="34" charset="-120"/>
               </a:rPr>
-              <a:t>Feasibility: buildable today (~1 GB pull, ~5 min regen); all 43 undated spectra fall outside the 239-filter evaluation set (105 / 61 / 73). Convention: dry_feb headline, belg_feb sensitivity.</a:t>
+              <a:t>Feasibility: buildable today (~1 GB pull, ~5 min regen); all 43 undated spectra fall outside the 239-filter evaluation set (105 / 61 / 73).</a:t>
             </a:r>
             <a:endParaRPr lang="en-US" sz="1250" dirty="0"/>
           </a:p>
@@ -8686,7 +9266,7 @@
               <a:buNone/>
             </a:pPr>
             <a:r>
-              <a:rPr lang="en-US" sz="2700" b="1" dirty="0">
+              <a:rPr lang="en-US" sz="2600" b="1" dirty="0">
                 <a:solidFill>
                   <a:srgbClr val="1A1D21"/>
                 </a:solidFill>
@@ -8696,7 +9276,7 @@
               </a:rPr>
               <a:t>Quartz TOR is now the ask — every EC reference we hold is circular with one axis or the other.</a:t>
             </a:r>
-            <a:endParaRPr lang="en-US" sz="2700" dirty="0"/>
+            <a:endParaRPr lang="en-US" sz="2600" dirty="0"/>
           </a:p>
         </p:txBody>
       </p:sp>
@@ -8763,8 +9343,8 @@
         </p:nvSpPr>
         <p:spPr>
           <a:xfrm>
-            <a:off x="5486400" y="5678424"/>
-            <a:ext cx="6126480" cy="310896"/>
+            <a:off x="5486400" y="5696712"/>
+            <a:ext cx="6126480" cy="292608"/>
           </a:xfrm>
           <a:prstGeom prst="rect">
             <a:avLst/>
@@ -8817,7 +9397,7 @@
         <p:spPr>
           <a:xfrm>
             <a:off x="502920" y="1737360"/>
-            <a:ext cx="4663440" cy="4206240"/>
+            <a:ext cx="4663440" cy="3977640"/>
           </a:xfrm>
           <a:prstGeom prst="rect">
             <a:avLst/>
@@ -8864,7 +9444,7 @@
                 <a:ea typeface="Calibri" pitchFamily="34" charset="-122"/>
                 <a:cs typeface="Calibri" pitchFamily="34" charset="-120"/>
               </a:rPr>
-              <a:t>Spec (ftir_16, committed): each day separates MAC 6 from MAC 10 by ~3σ → 11–13 days per season, ~36 filters in total (12 + 13 + 11). TOR needs quartz; archived Teflon cannot substitute; Adama Batch-54 proves the chain works.</a:t>
+              <a:t>Spec (ftir_16, committed): ~3σ/day separation of MAC 6 vs 10 → 11–13 days per season, ~36 filters in total (12 + 13 + 11). TOR needs quartz; archived Teflon cannot substitute; Adama Batch-54 proves the chain works.</a:t>
             </a:r>
             <a:endParaRPr lang="en-US" sz="1250" dirty="0"/>
           </a:p>
@@ -8884,7 +9464,7 @@
                 <a:ea typeface="Calibri" pitchFamily="34" charset="-122"/>
                 <a:cs typeface="Calibri" pitchFamily="34" charset="-120"/>
               </a:rPr>
-              <a:t>Pre-registered before any data: if the ~21 Mm⁻¹ were a persistent background, ETBI (median 26.9 Mm⁻¹) would be mostly background — its FTIR-EC should come out very low the day its spectra arrive.</a:t>
+              <a:t>Pre-registered: if the ~21 Mm⁻¹ were a persistent background, ETBI (median 26.9 Mm⁻¹) would be mostly background — its FTIR-EC should come out very low the day its spectra arrive.</a:t>
             </a:r>
             <a:endParaRPr lang="en-US" sz="1250" dirty="0"/>
           </a:p>
@@ -8898,12 +9478,12 @@
         </p:nvSpPr>
         <p:spPr>
           <a:xfrm>
-            <a:off x="502920" y="5989320"/>
-            <a:ext cx="2308860" cy="384048"/>
+            <a:off x="502920" y="5532120"/>
+            <a:ext cx="2377440" cy="402336"/>
           </a:xfrm>
           <a:prstGeom prst="roundRect">
             <a:avLst>
-              <a:gd name="adj" fmla="val 14286"/>
+              <a:gd name="adj" fmla="val 13636"/>
             </a:avLst>
           </a:prstGeom>
           <a:solidFill>
@@ -8925,8 +9505,8 @@
         </p:nvSpPr>
         <p:spPr>
           <a:xfrm>
-            <a:off x="576072" y="5989320"/>
-            <a:ext cx="2217420" cy="384048"/>
+            <a:off x="612648" y="5532120"/>
+            <a:ext cx="2194560" cy="402336"/>
           </a:xfrm>
           <a:prstGeom prst="rect">
             <a:avLst/>
@@ -8978,12 +9558,12 @@
         </p:nvSpPr>
         <p:spPr>
           <a:xfrm>
-            <a:off x="2976372" y="5989320"/>
-            <a:ext cx="1933956" cy="384048"/>
+            <a:off x="502920" y="6044184"/>
+            <a:ext cx="2377440" cy="402336"/>
           </a:xfrm>
           <a:prstGeom prst="roundRect">
             <a:avLst>
-              <a:gd name="adj" fmla="val 14286"/>
+              <a:gd name="adj" fmla="val 13636"/>
             </a:avLst>
           </a:prstGeom>
           <a:solidFill>
@@ -9005,8 +9585,8 @@
         </p:nvSpPr>
         <p:spPr>
           <a:xfrm>
-            <a:off x="3049524" y="5989320"/>
-            <a:ext cx="1842516" cy="384048"/>
+            <a:off x="612648" y="6044184"/>
+            <a:ext cx="2194560" cy="402336"/>
           </a:xfrm>
           <a:prstGeom prst="rect">
             <a:avLst/>
@@ -9045,86 +9625,6 @@
                 <a:cs typeface="Calibri" pitchFamily="34" charset="-120"/>
               </a:rPr>
               <a:t>~36</a:t>
-            </a:r>
-            <a:endParaRPr lang="en-US" sz="1100" dirty="0"/>
-          </a:p>
-        </p:txBody>
-      </p:sp>
-      <p:sp>
-        <p:nvSpPr>
-          <p:cNvPr id="12" name="Shape 9"/>
-          <p:cNvSpPr/>
-          <p:nvPr/>
-        </p:nvSpPr>
-        <p:spPr>
-          <a:xfrm>
-            <a:off x="5074920" y="5989320"/>
-            <a:ext cx="4201668" cy="384048"/>
-          </a:xfrm>
-          <a:prstGeom prst="roundRect">
-            <a:avLst>
-              <a:gd name="adj" fmla="val 14286"/>
-            </a:avLst>
-          </a:prstGeom>
-          <a:solidFill>
-            <a:srgbClr val="F4F5F3"/>
-          </a:solidFill>
-          <a:ln w="9525">
-            <a:solidFill>
-              <a:srgbClr val="DDE0DC"/>
-            </a:solidFill>
-            <a:prstDash val="solid"/>
-          </a:ln>
-        </p:spPr>
-      </p:sp>
-      <p:sp>
-        <p:nvSpPr>
-          <p:cNvPr id="13" name="Text 10"/>
-          <p:cNvSpPr/>
-          <p:nvPr/>
-        </p:nvSpPr>
-        <p:spPr>
-          <a:xfrm>
-            <a:off x="5148072" y="5989320"/>
-            <a:ext cx="4110228" cy="384048"/>
-          </a:xfrm>
-          <a:prstGeom prst="rect">
-            <a:avLst/>
-          </a:prstGeom>
-          <a:noFill/>
-          <a:ln/>
-        </p:spPr>
-        <p:txBody>
-          <a:bodyPr wrap="square" lIns="0" tIns="0" rIns="0" bIns="0" rtlCol="0" anchor="ctr"/>
-          <a:lstStyle/>
-          <a:p>
-            <a:pPr indent="0" marL="0">
-              <a:buNone/>
-            </a:pPr>
-            <a:r>
-              <a:rPr lang="en-US" sz="1100" dirty="0">
-                <a:solidFill>
-                  <a:srgbClr val="5E6369"/>
-                </a:solidFill>
-                <a:latin typeface="Calibri" pitchFamily="34" charset="0"/>
-                <a:ea typeface="Calibri" pitchFamily="34" charset="-122"/>
-                <a:cs typeface="Calibri" pitchFamily="34" charset="-120"/>
-              </a:rPr>
-              <a:t>one-pager  </a:t>
-            </a:r>
-            <a:pPr indent="0" marL="0">
-              <a:buNone/>
-            </a:pPr>
-            <a:r>
-              <a:rPr lang="en-US" sz="1100" b="1" dirty="0">
-                <a:solidFill>
-                  <a:srgbClr val="2C6E9E"/>
-                </a:solidFill>
-                <a:latin typeface="Calibri" pitchFamily="34" charset="0"/>
-                <a:ea typeface="Calibri" pitchFamily="34" charset="-122"/>
-                <a:cs typeface="Calibri" pitchFamily="34" charset="-120"/>
-              </a:rPr>
-              <a:t>committed, ready to hand over</a:t>
             </a:r>
             <a:endParaRPr lang="en-US" sz="1100" dirty="0"/>
           </a:p>
@@ -9249,11 +9749,11 @@
         <p:spPr>
           <a:xfrm>
             <a:off x="502920" y="1828800"/>
-            <a:ext cx="5486400" cy="1389888"/>
+            <a:ext cx="5486400" cy="1371600"/>
           </a:xfrm>
           <a:prstGeom prst="roundRect">
             <a:avLst>
-              <a:gd name="adj" fmla="val 5263"/>
+              <a:gd name="adj" fmla="val 5333"/>
             </a:avLst>
           </a:prstGeom>
           <a:solidFill>
@@ -9275,7 +9775,7 @@
         </p:nvSpPr>
         <p:spPr>
           <a:xfrm>
-            <a:off x="704088" y="1920240"/>
+            <a:off x="704088" y="1938528"/>
             <a:ext cx="5120640" cy="365760"/>
           </a:xfrm>
           <a:prstGeom prst="rect">
@@ -9314,8 +9814,8 @@
         </p:nvSpPr>
         <p:spPr>
           <a:xfrm>
-            <a:off x="704088" y="2286000"/>
-            <a:ext cx="5120640" cy="868680"/>
+            <a:off x="704088" y="2331720"/>
+            <a:ext cx="5120640" cy="777240"/>
           </a:xfrm>
           <a:prstGeom prst="rect">
             <a:avLst/>
@@ -9354,11 +9854,11 @@
         <p:spPr>
           <a:xfrm>
             <a:off x="6263640" y="1828800"/>
-            <a:ext cx="5486400" cy="1389888"/>
+            <a:ext cx="5486400" cy="1371600"/>
           </a:xfrm>
           <a:prstGeom prst="roundRect">
             <a:avLst>
-              <a:gd name="adj" fmla="val 5263"/>
+              <a:gd name="adj" fmla="val 5333"/>
             </a:avLst>
           </a:prstGeom>
           <a:solidFill>
@@ -9380,7 +9880,7 @@
         </p:nvSpPr>
         <p:spPr>
           <a:xfrm>
-            <a:off x="6464808" y="1920240"/>
+            <a:off x="6464808" y="1938528"/>
             <a:ext cx="5120640" cy="365760"/>
           </a:xfrm>
           <a:prstGeom prst="rect">
@@ -9419,8 +9919,8 @@
         </p:nvSpPr>
         <p:spPr>
           <a:xfrm>
-            <a:off x="6464808" y="2286000"/>
-            <a:ext cx="5120640" cy="868680"/>
+            <a:off x="6464808" y="2331720"/>
+            <a:ext cx="5120640" cy="777240"/>
           </a:xfrm>
           <a:prstGeom prst="rect">
             <a:avLst/>
@@ -9458,12 +9958,12 @@
         </p:nvSpPr>
         <p:spPr>
           <a:xfrm>
-            <a:off x="502920" y="3401568"/>
-            <a:ext cx="5486400" cy="1389888"/>
+            <a:off x="502920" y="3383280"/>
+            <a:ext cx="5486400" cy="1371600"/>
           </a:xfrm>
           <a:prstGeom prst="roundRect">
             <a:avLst>
-              <a:gd name="adj" fmla="val 5263"/>
+              <a:gd name="adj" fmla="val 5333"/>
             </a:avLst>
           </a:prstGeom>
           <a:solidFill>
@@ -9524,8 +10024,8 @@
         </p:nvSpPr>
         <p:spPr>
           <a:xfrm>
-            <a:off x="704088" y="3858768"/>
-            <a:ext cx="5120640" cy="868680"/>
+            <a:off x="704088" y="3886200"/>
+            <a:ext cx="5120640" cy="777240"/>
           </a:xfrm>
           <a:prstGeom prst="rect">
             <a:avLst/>
@@ -9563,12 +10063,12 @@
         </p:nvSpPr>
         <p:spPr>
           <a:xfrm>
-            <a:off x="6263640" y="3401568"/>
-            <a:ext cx="5486400" cy="1389888"/>
+            <a:off x="6263640" y="3383280"/>
+            <a:ext cx="5486400" cy="1371600"/>
           </a:xfrm>
           <a:prstGeom prst="roundRect">
             <a:avLst>
-              <a:gd name="adj" fmla="val 5263"/>
+              <a:gd name="adj" fmla="val 5333"/>
             </a:avLst>
           </a:prstGeom>
           <a:solidFill>
@@ -9629,8 +10129,8 @@
         </p:nvSpPr>
         <p:spPr>
           <a:xfrm>
-            <a:off x="6464808" y="3858768"/>
-            <a:ext cx="5120640" cy="868680"/>
+            <a:off x="6464808" y="3886200"/>
+            <a:ext cx="5120640" cy="777240"/>
           </a:xfrm>
           <a:prstGeom prst="rect">
             <a:avLst/>
@@ -9668,12 +10168,12 @@
         </p:nvSpPr>
         <p:spPr>
           <a:xfrm>
-            <a:off x="502920" y="4974336"/>
-            <a:ext cx="5486400" cy="1389888"/>
+            <a:off x="502920" y="4937760"/>
+            <a:ext cx="5486400" cy="1371600"/>
           </a:xfrm>
           <a:prstGeom prst="roundRect">
             <a:avLst>
-              <a:gd name="adj" fmla="val 5263"/>
+              <a:gd name="adj" fmla="val 5333"/>
             </a:avLst>
           </a:prstGeom>
           <a:solidFill>
@@ -9695,7 +10195,7 @@
         </p:nvSpPr>
         <p:spPr>
           <a:xfrm>
-            <a:off x="704088" y="5065776"/>
+            <a:off x="704088" y="5047488"/>
             <a:ext cx="5120640" cy="365760"/>
           </a:xfrm>
           <a:prstGeom prst="rect">
@@ -9734,8 +10234,8 @@
         </p:nvSpPr>
         <p:spPr>
           <a:xfrm>
-            <a:off x="704088" y="5431536"/>
-            <a:ext cx="5120640" cy="868680"/>
+            <a:off x="704088" y="5440680"/>
+            <a:ext cx="5120640" cy="777240"/>
           </a:xfrm>
           <a:prstGeom prst="rect">
             <a:avLst/>
@@ -9773,12 +10273,12 @@
         </p:nvSpPr>
         <p:spPr>
           <a:xfrm>
-            <a:off x="6263640" y="4974336"/>
-            <a:ext cx="5486400" cy="1389888"/>
+            <a:off x="6263640" y="4937760"/>
+            <a:ext cx="5486400" cy="1371600"/>
           </a:xfrm>
           <a:prstGeom prst="roundRect">
             <a:avLst>
-              <a:gd name="adj" fmla="val 5263"/>
+              <a:gd name="adj" fmla="val 5333"/>
             </a:avLst>
           </a:prstGeom>
           <a:solidFill>
@@ -9800,7 +10300,7 @@
         </p:nvSpPr>
         <p:spPr>
           <a:xfrm>
-            <a:off x="6464808" y="5065776"/>
+            <a:off x="6464808" y="5047488"/>
             <a:ext cx="5120640" cy="365760"/>
           </a:xfrm>
           <a:prstGeom prst="rect">
@@ -9839,8 +10339,8 @@
         </p:nvSpPr>
         <p:spPr>
           <a:xfrm>
-            <a:off x="6464808" y="5431536"/>
-            <a:ext cx="5120640" cy="868680"/>
+            <a:off x="6464808" y="5440680"/>
+            <a:ext cx="5120640" cy="777240"/>
           </a:xfrm>
           <a:prstGeom prst="rect">
             <a:avLst/>
@@ -10005,7 +10505,7 @@
               <a:buNone/>
             </a:pPr>
             <a:r>
-              <a:rPr lang="en-US" sz="2700" b="1" dirty="0">
+              <a:rPr lang="en-US" sz="2600" b="1" dirty="0">
                 <a:solidFill>
                   <a:srgbClr val="1A1D21"/>
                 </a:solidFill>
@@ -10015,7 +10515,7 @@
               </a:rPr>
               <a:t>Since you saw it — and what needs you today.</a:t>
             </a:r>
-            <a:endParaRPr lang="en-US" sz="2700" dirty="0"/>
+            <a:endParaRPr lang="en-US" sz="2600" dirty="0"/>
           </a:p>
         </p:txBody>
       </p:sp>
@@ -11506,7 +12006,7 @@
               <a:buNone/>
             </a:pPr>
             <a:r>
-              <a:rPr lang="en-US" sz="2700" b="1" dirty="0">
+              <a:rPr lang="en-US" sz="2600" b="1" dirty="0">
                 <a:solidFill>
                   <a:srgbClr val="1A1D21"/>
                 </a:solidFill>
@@ -11516,335 +12016,75 @@
               </a:rPr>
               <a:t>The random-cohort claim was wrong on all three counts — and never comparable anyway.</a:t>
             </a:r>
-            <a:endParaRPr lang="en-US" sz="2700" dirty="0"/>
-          </a:p>
-        </p:txBody>
-      </p:sp>
-      <p:sp>
-        <p:nvSpPr>
-          <p:cNvPr id="4" name="Shape 2"/>
+            <a:endParaRPr lang="en-US" sz="2600" dirty="0"/>
+          </a:p>
+        </p:txBody>
+      </p:sp>
+      <p:graphicFrame>
+        <p:nvGraphicFramePr>
+          <p:cNvPr id="4" name="Chart 0" descr=""/>
+          <p:cNvGraphicFramePr/>
+          <p:nvPr/>
+        </p:nvGraphicFramePr>
+        <p:xfrm>
+          <a:off x="5120640" y="1600200"/>
+          <a:ext cx="6583680" cy="4160520"/>
+        </p:xfrm>
+        <a:graphic xmlns:a="http://schemas.openxmlformats.org/drawingml/2006/main">
+          <a:graphicData uri="http://schemas.openxmlformats.org/drawingml/2006/chart">
+            <c:chart xmlns:c="http://schemas.openxmlformats.org/drawingml/2006/chart" r:id="rId1"/>
+          </a:graphicData>
+        </a:graphic>
+      </p:graphicFrame>
+      <p:sp>
+        <p:nvSpPr>
+          <p:cNvPr id="5" name="Text 2"/>
+          <p:cNvSpPr/>
+          <p:nvPr/>
+        </p:nvSpPr>
+        <p:spPr>
+          <a:xfrm>
+            <a:off x="5120640" y="5779008"/>
+            <a:ext cx="6583680" cy="274320"/>
+          </a:xfrm>
+          <a:prstGeom prst="rect">
+            <a:avLst/>
+          </a:prstGeom>
+          <a:noFill/>
+          <a:ln/>
+        </p:spPr>
+        <p:txBody>
+          <a:bodyPr wrap="square" lIns="0" tIns="0" rIns="0" bIns="0" rtlCol="0" anchor="ctr"/>
+          <a:lstStyle/>
+          <a:p>
+            <a:pPr algn="ctr" indent="0" marL="0">
+              <a:buNone/>
+            </a:pPr>
+            <a:r>
+              <a:rPr lang="en-US" sz="850" dirty="0">
+                <a:solidFill>
+                  <a:srgbClr val="8A9098"/>
+                </a:solidFill>
+                <a:latin typeface="Courier New" pitchFamily="34" charset="0"/>
+                <a:ea typeface="Courier New" pitchFamily="34" charset="-122"/>
+                <a:cs typeface="Courier New" pitchFamily="34" charset="-120"/>
+              </a:rPr>
+              <a:t>held-out TOR RMSE (µg/filter) — run_ftir_11, committed</a:t>
+            </a:r>
+            <a:endParaRPr lang="en-US" sz="850" dirty="0"/>
+          </a:p>
+        </p:txBody>
+      </p:sp>
+      <p:sp>
+        <p:nvSpPr>
+          <p:cNvPr id="6" name="Text 3"/>
           <p:cNvSpPr/>
           <p:nvPr/>
         </p:nvSpPr>
         <p:spPr>
           <a:xfrm>
             <a:off x="502920" y="1691640"/>
-            <a:ext cx="3566160" cy="1371600"/>
-          </a:xfrm>
-          <a:prstGeom prst="roundRect">
-            <a:avLst>
-              <a:gd name="adj" fmla="val 5333"/>
-            </a:avLst>
-          </a:prstGeom>
-          <a:solidFill>
-            <a:srgbClr val="F4F5F3"/>
-          </a:solidFill>
-          <a:ln w="12700">
-            <a:solidFill>
-              <a:srgbClr val="DDE0DC"/>
-            </a:solidFill>
-            <a:prstDash val="solid"/>
-          </a:ln>
-        </p:spPr>
-      </p:sp>
-      <p:sp>
-        <p:nvSpPr>
-          <p:cNvPr id="5" name="Text 3"/>
-          <p:cNvSpPr/>
-          <p:nvPr/>
-        </p:nvSpPr>
-        <p:spPr>
-          <a:xfrm>
-            <a:off x="685800" y="1828800"/>
-            <a:ext cx="3200400" cy="685800"/>
-          </a:xfrm>
-          <a:prstGeom prst="rect">
-            <a:avLst/>
-          </a:prstGeom>
-          <a:noFill/>
-          <a:ln/>
-        </p:spPr>
-        <p:txBody>
-          <a:bodyPr wrap="square" lIns="0" tIns="0" rIns="0" bIns="0" rtlCol="0" anchor="ctr"/>
-          <a:lstStyle/>
-          <a:p>
-            <a:pPr indent="0" marL="0">
-              <a:buNone/>
-            </a:pPr>
-            <a:r>
-              <a:rPr lang="en-US" sz="2800" b="1" dirty="0">
-                <a:solidFill>
-                  <a:srgbClr val="B23327"/>
-                </a:solidFill>
-                <a:latin typeface="Calibri" pitchFamily="34" charset="0"/>
-                <a:ea typeface="Calibri" pitchFamily="34" charset="-122"/>
-                <a:cs typeface="Calibri" pitchFamily="34" charset="-120"/>
-              </a:rPr>
-              <a:t>5</a:t>
-            </a:r>
-            <a:endParaRPr lang="en-US" sz="2800" dirty="0"/>
-          </a:p>
-        </p:txBody>
-      </p:sp>
-      <p:sp>
-        <p:nvSpPr>
-          <p:cNvPr id="6" name="Text 4"/>
-          <p:cNvSpPr/>
-          <p:nvPr/>
-        </p:nvSpPr>
-        <p:spPr>
-          <a:xfrm>
-            <a:off x="685800" y="2514600"/>
-            <a:ext cx="3200400" cy="365760"/>
-          </a:xfrm>
-          <a:prstGeom prst="rect">
-            <a:avLst/>
-          </a:prstGeom>
-          <a:noFill/>
-          <a:ln/>
-        </p:spPr>
-        <p:txBody>
-          <a:bodyPr wrap="square" lIns="0" tIns="0" rIns="0" bIns="0" rtlCol="0" anchor="ctr"/>
-          <a:lstStyle/>
-          <a:p>
-            <a:pPr indent="0" marL="0">
-              <a:buNone/>
-            </a:pPr>
-            <a:r>
-              <a:rPr lang="en-US" sz="1200" dirty="0">
-                <a:solidFill>
-                  <a:srgbClr val="5E6369"/>
-                </a:solidFill>
-                <a:latin typeface="Calibri" pitchFamily="34" charset="0"/>
-                <a:ea typeface="Calibri" pitchFamily="34" charset="-122"/>
-                <a:cs typeface="Calibri" pitchFamily="34" charset="-120"/>
-              </a:rPr>
-              <a:t>“ten” cohorts</a:t>
-            </a:r>
-            <a:endParaRPr lang="en-US" sz="1200" dirty="0"/>
-          </a:p>
-        </p:txBody>
-      </p:sp>
-      <p:sp>
-        <p:nvSpPr>
-          <p:cNvPr id="7" name="Shape 5"/>
-          <p:cNvSpPr/>
-          <p:nvPr/>
-        </p:nvSpPr>
-        <p:spPr>
-          <a:xfrm>
-            <a:off x="4279392" y="1691640"/>
-            <a:ext cx="3566160" cy="1371600"/>
-          </a:xfrm>
-          <a:prstGeom prst="roundRect">
-            <a:avLst>
-              <a:gd name="adj" fmla="val 5333"/>
-            </a:avLst>
-          </a:prstGeom>
-          <a:solidFill>
-            <a:srgbClr val="F4F5F3"/>
-          </a:solidFill>
-          <a:ln w="12700">
-            <a:solidFill>
-              <a:srgbClr val="DDE0DC"/>
-            </a:solidFill>
-            <a:prstDash val="solid"/>
-          </a:ln>
-        </p:spPr>
-      </p:sp>
-      <p:sp>
-        <p:nvSpPr>
-          <p:cNvPr id="8" name="Text 6"/>
-          <p:cNvSpPr/>
-          <p:nvPr/>
-        </p:nvSpPr>
-        <p:spPr>
-          <a:xfrm>
-            <a:off x="4462272" y="1828800"/>
-            <a:ext cx="3200400" cy="685800"/>
-          </a:xfrm>
-          <a:prstGeom prst="rect">
-            <a:avLst/>
-          </a:prstGeom>
-          <a:noFill/>
-          <a:ln/>
-        </p:spPr>
-        <p:txBody>
-          <a:bodyPr wrap="square" lIns="0" tIns="0" rIns="0" bIns="0" rtlCol="0" anchor="ctr"/>
-          <a:lstStyle/>
-          <a:p>
-            <a:pPr indent="0" marL="0">
-              <a:buNone/>
-            </a:pPr>
-            <a:r>
-              <a:rPr lang="en-US" sz="2800" b="1" dirty="0">
-                <a:solidFill>
-                  <a:srgbClr val="B23327"/>
-                </a:solidFill>
-                <a:latin typeface="Calibri" pitchFamily="34" charset="0"/>
-                <a:ea typeface="Calibri" pitchFamily="34" charset="-122"/>
-                <a:cs typeface="Calibri" pitchFamily="34" charset="-120"/>
-              </a:rPr>
-              <a:t>3.10–5.00</a:t>
-            </a:r>
-            <a:endParaRPr lang="en-US" sz="2800" dirty="0"/>
-          </a:p>
-        </p:txBody>
-      </p:sp>
-      <p:sp>
-        <p:nvSpPr>
-          <p:cNvPr id="9" name="Text 7"/>
-          <p:cNvSpPr/>
-          <p:nvPr/>
-        </p:nvSpPr>
-        <p:spPr>
-          <a:xfrm>
-            <a:off x="4462272" y="2514600"/>
-            <a:ext cx="3200400" cy="365760"/>
-          </a:xfrm>
-          <a:prstGeom prst="rect">
-            <a:avLst/>
-          </a:prstGeom>
-          <a:noFill/>
-          <a:ln/>
-        </p:spPr>
-        <p:txBody>
-          <a:bodyPr wrap="square" lIns="0" tIns="0" rIns="0" bIns="0" rtlCol="0" anchor="ctr"/>
-          <a:lstStyle/>
-          <a:p>
-            <a:pPr indent="0" marL="0">
-              <a:buNone/>
-            </a:pPr>
-            <a:r>
-              <a:rPr lang="en-US" sz="1200" dirty="0">
-                <a:solidFill>
-                  <a:srgbClr val="5E6369"/>
-                </a:solidFill>
-                <a:latin typeface="Calibri" pitchFamily="34" charset="0"/>
-                <a:ea typeface="Calibri" pitchFamily="34" charset="-122"/>
-                <a:cs typeface="Calibri" pitchFamily="34" charset="-120"/>
-              </a:rPr>
-              <a:t>“4.4–7.3” range</a:t>
-            </a:r>
-            <a:endParaRPr lang="en-US" sz="1200" dirty="0"/>
-          </a:p>
-        </p:txBody>
-      </p:sp>
-      <p:sp>
-        <p:nvSpPr>
-          <p:cNvPr id="10" name="Shape 8"/>
-          <p:cNvSpPr/>
-          <p:nvPr/>
-        </p:nvSpPr>
-        <p:spPr>
-          <a:xfrm>
-            <a:off x="8055864" y="1691640"/>
-            <a:ext cx="3566160" cy="1371600"/>
-          </a:xfrm>
-          <a:prstGeom prst="roundRect">
-            <a:avLst>
-              <a:gd name="adj" fmla="val 5333"/>
-            </a:avLst>
-          </a:prstGeom>
-          <a:solidFill>
-            <a:srgbClr val="F4F5F3"/>
-          </a:solidFill>
-          <a:ln w="12700">
-            <a:solidFill>
-              <a:srgbClr val="DDE0DC"/>
-            </a:solidFill>
-            <a:prstDash val="solid"/>
-          </a:ln>
-        </p:spPr>
-      </p:sp>
-      <p:sp>
-        <p:nvSpPr>
-          <p:cNvPr id="11" name="Text 9"/>
-          <p:cNvSpPr/>
-          <p:nvPr/>
-        </p:nvSpPr>
-        <p:spPr>
-          <a:xfrm>
-            <a:off x="8238744" y="1828800"/>
-            <a:ext cx="3200400" cy="685800"/>
-          </a:xfrm>
-          <a:prstGeom prst="rect">
-            <a:avLst/>
-          </a:prstGeom>
-          <a:noFill/>
-          <a:ln/>
-        </p:spPr>
-        <p:txBody>
-          <a:bodyPr wrap="square" lIns="0" tIns="0" rIns="0" bIns="0" rtlCol="0" anchor="ctr"/>
-          <a:lstStyle/>
-          <a:p>
-            <a:pPr indent="0" marL="0">
-              <a:buNone/>
-            </a:pPr>
-            <a:r>
-              <a:rPr lang="en-US" sz="2800" b="1" dirty="0">
-                <a:solidFill>
-                  <a:srgbClr val="B23327"/>
-                </a:solidFill>
-                <a:latin typeface="Calibri" pitchFamily="34" charset="0"/>
-                <a:ea typeface="Calibri" pitchFamily="34" charset="-122"/>
-                <a:cs typeface="Calibri" pitchFamily="34" charset="-120"/>
-              </a:rPr>
-              <a:t>beats OCEC-800</a:t>
-            </a:r>
-            <a:endParaRPr lang="en-US" sz="2800" dirty="0"/>
-          </a:p>
-        </p:txBody>
-      </p:sp>
-      <p:sp>
-        <p:nvSpPr>
-          <p:cNvPr id="12" name="Text 10"/>
-          <p:cNvSpPr/>
-          <p:nvPr/>
-        </p:nvSpPr>
-        <p:spPr>
-          <a:xfrm>
-            <a:off x="8238744" y="2514600"/>
-            <a:ext cx="3200400" cy="365760"/>
-          </a:xfrm>
-          <a:prstGeom prst="rect">
-            <a:avLst/>
-          </a:prstGeom>
-          <a:noFill/>
-          <a:ln/>
-        </p:spPr>
-        <p:txBody>
-          <a:bodyPr wrap="square" lIns="0" tIns="0" rIns="0" bIns="0" rtlCol="0" anchor="ctr"/>
-          <a:lstStyle/>
-          <a:p>
-            <a:pPr indent="0" marL="0">
-              <a:buNone/>
-            </a:pPr>
-            <a:r>
-              <a:rPr lang="en-US" sz="1200" dirty="0">
-                <a:solidFill>
-                  <a:srgbClr val="5E6369"/>
-                </a:solidFill>
-                <a:latin typeface="Calibri" pitchFamily="34" charset="0"/>
-                <a:ea typeface="Calibri" pitchFamily="34" charset="-122"/>
-                <a:cs typeface="Calibri" pitchFamily="34" charset="-120"/>
-              </a:rPr>
-              <a:t>random #3</a:t>
-            </a:r>
-            <a:endParaRPr lang="en-US" sz="1200" dirty="0"/>
-          </a:p>
-        </p:txBody>
-      </p:sp>
-      <p:sp>
-        <p:nvSpPr>
-          <p:cNvPr id="13" name="Text 11"/>
-          <p:cNvSpPr/>
-          <p:nvPr/>
-        </p:nvSpPr>
-        <p:spPr>
-          <a:xfrm>
-            <a:off x="502920" y="3429000"/>
-            <a:ext cx="11155680" cy="2743200"/>
+            <a:ext cx="4297680" cy="2651760"/>
           </a:xfrm>
           <a:prstGeom prst="rect">
             <a:avLst/>
@@ -11863,7 +12103,7 @@
               <a:buNone/>
             </a:pPr>
             <a:r>
-              <a:rPr lang="en-US" sz="1250" dirty="0">
+              <a:rPr lang="en-US" sz="1200" b="1" dirty="0">
                 <a:solidFill>
                   <a:srgbClr val="1A1D21"/>
                 </a:solidFill>
@@ -11871,9 +12111,9 @@
                 <a:ea typeface="Calibri" pitchFamily="34" charset="-122"/>
                 <a:cs typeface="Calibri" pitchFamily="34" charset="-120"/>
               </a:rPr>
-              <a:t>Each cohort was scored on its own disjoint-site split (n_test 114–194) — those RMSEs were never comparable across rows. The claim is out of the deck, the summary and the email draft.</a:t>
-            </a:r>
-            <a:endParaRPr lang="en-US" sz="1250" dirty="0"/>
+              <a:t>The claim said “beats ten size-matched random cohorts, 3.4 vs 4.4–7.3”. The committed numbers: five cohorts, range 3.10–5.00 — and random #3 beats OCEC-800.</a:t>
+            </a:r>
+            <a:endParaRPr lang="en-US" sz="1200" dirty="0"/>
           </a:p>
           <a:p>
             <a:pPr algn="l" indent="0" marL="0">
@@ -11883,7 +12123,7 @@
               <a:buNone/>
             </a:pPr>
             <a:r>
-              <a:rPr lang="en-US" sz="1250" b="1" dirty="0">
+              <a:rPr lang="en-US" sz="1200" dirty="0">
                 <a:solidFill>
                   <a:srgbClr val="1A1D21"/>
                 </a:solidFill>
@@ -11891,9 +12131,9 @@
                 <a:ea typeface="Calibri" pitchFamily="34" charset="-122"/>
                 <a:cs typeface="Calibri" pitchFamily="34" charset="-120"/>
               </a:rPr>
-              <a:t>The conclusion survives on like-for-like evidence: same 190 Addis filters — RMSE 1.16 vs 1.48–2.24; held-out TOR R² 0.911 vs 0.594–0.775.</a:t>
-            </a:r>
-            <a:endParaRPr lang="en-US" sz="1250" dirty="0"/>
+              <a:t>Worse: each cohort was scored on its own disjoint-site split (n_test 114–194), so the comparison was never valid — the chart exists to show why it left the deck.</a:t>
+            </a:r>
+            <a:endParaRPr lang="en-US" sz="1200" dirty="0"/>
           </a:p>
           <a:p>
             <a:pPr algn="l" indent="0" marL="0">
@@ -11903,34 +12143,34 @@
               <a:buNone/>
             </a:pPr>
             <a:r>
-              <a:rPr lang="en-US" sz="1150" dirty="0">
-                <a:solidFill>
-                  <a:srgbClr val="5E6369"/>
-                </a:solidFill>
-                <a:latin typeface="Calibri" pitchFamily="34" charset="0"/>
-                <a:ea typeface="Calibri" pitchFamily="34" charset="-122"/>
-                <a:cs typeface="Calibri" pitchFamily="34" charset="-120"/>
-              </a:rPr>
-              <a:t>Also corrected: VIP ρ = 0.74/0.12 flagged uncorroborated (no executed notebook computes it); −1.61 → −1.62; ETBI contrast now vs Addis Dry median 43.2; “~91% baseline” qualified as one representative filter.</a:t>
-            </a:r>
-            <a:endParaRPr lang="en-US" sz="1250" dirty="0"/>
-          </a:p>
-        </p:txBody>
-      </p:sp>
-      <p:sp>
-        <p:nvSpPr>
-          <p:cNvPr id="14" name="Shape 12"/>
-          <p:cNvSpPr/>
-          <p:nvPr/>
-        </p:nvSpPr>
-        <p:spPr>
-          <a:xfrm>
-            <a:off x="502920" y="5989320"/>
-            <a:ext cx="2075688" cy="384048"/>
+              <a:rPr lang="en-US" sz="1200" dirty="0">
+                <a:solidFill>
+                  <a:srgbClr val="1A1D21"/>
+                </a:solidFill>
+                <a:latin typeface="Calibri" pitchFamily="34" charset="0"/>
+                <a:ea typeface="Calibri" pitchFamily="34" charset="-122"/>
+                <a:cs typeface="Calibri" pitchFamily="34" charset="-120"/>
+              </a:rPr>
+              <a:t>What replaces it is like-for-like and stronger:</a:t>
+            </a:r>
+            <a:endParaRPr lang="en-US" sz="1200" dirty="0"/>
+          </a:p>
+        </p:txBody>
+      </p:sp>
+      <p:sp>
+        <p:nvSpPr>
+          <p:cNvPr id="7" name="Shape 4"/>
+          <p:cNvSpPr/>
+          <p:nvPr/>
+        </p:nvSpPr>
+        <p:spPr>
+          <a:xfrm>
+            <a:off x="502920" y="4206240"/>
+            <a:ext cx="3840480" cy="402336"/>
           </a:xfrm>
           <a:prstGeom prst="roundRect">
             <a:avLst>
-              <a:gd name="adj" fmla="val 14286"/>
+              <a:gd name="adj" fmla="val 13636"/>
             </a:avLst>
           </a:prstGeom>
           <a:solidFill>
@@ -11946,14 +12186,14 @@
       </p:sp>
       <p:sp>
         <p:nvSpPr>
-          <p:cNvPr id="15" name="Text 13"/>
-          <p:cNvSpPr/>
-          <p:nvPr/>
-        </p:nvSpPr>
-        <p:spPr>
-          <a:xfrm>
-            <a:off x="576072" y="5989320"/>
-            <a:ext cx="1984248" cy="384048"/>
+          <p:cNvPr id="8" name="Text 5"/>
+          <p:cNvSpPr/>
+          <p:nvPr/>
+        </p:nvSpPr>
+        <p:spPr>
+          <a:xfrm>
+            <a:off x="612648" y="4206240"/>
+            <a:ext cx="3657600" cy="402336"/>
           </a:xfrm>
           <a:prstGeom prst="rect">
             <a:avLst/>
@@ -11977,7 +12217,7 @@
                 <a:ea typeface="Calibri" pitchFamily="34" charset="-122"/>
                 <a:cs typeface="Calibri" pitchFamily="34" charset="-120"/>
               </a:rPr>
-              <a:t>fix pushed  </a:t>
+              <a:t>same 190 filters, RMSE  </a:t>
             </a:r>
             <a:pPr indent="0" marL="0">
               <a:buNone/>
@@ -11991,7 +12231,7 @@
                 <a:ea typeface="Calibri" pitchFamily="34" charset="-122"/>
                 <a:cs typeface="Calibri" pitchFamily="34" charset="-120"/>
               </a:rPr>
-              <a:t>53c332e</a:t>
+              <a:t>1.16 vs 1.48–2.24</a:t>
             </a:r>
             <a:endParaRPr lang="en-US" sz="1100" dirty="0"/>
           </a:p>
@@ -11999,18 +12239,18 @@
       </p:sp>
       <p:sp>
         <p:nvSpPr>
-          <p:cNvPr id="16" name="Shape 14"/>
-          <p:cNvSpPr/>
-          <p:nvPr/>
-        </p:nvSpPr>
-        <p:spPr>
-          <a:xfrm>
-            <a:off x="2743200" y="5989320"/>
-            <a:ext cx="3776472" cy="384048"/>
+          <p:cNvPr id="9" name="Shape 6"/>
+          <p:cNvSpPr/>
+          <p:nvPr/>
+        </p:nvSpPr>
+        <p:spPr>
+          <a:xfrm>
+            <a:off x="502920" y="4718304"/>
+            <a:ext cx="3840480" cy="402336"/>
           </a:xfrm>
           <a:prstGeom prst="roundRect">
             <a:avLst>
-              <a:gd name="adj" fmla="val 14286"/>
+              <a:gd name="adj" fmla="val 13636"/>
             </a:avLst>
           </a:prstGeom>
           <a:solidFill>
@@ -12026,14 +12266,14 @@
       </p:sp>
       <p:sp>
         <p:nvSpPr>
-          <p:cNvPr id="17" name="Text 15"/>
-          <p:cNvSpPr/>
-          <p:nvPr/>
-        </p:nvSpPr>
-        <p:spPr>
-          <a:xfrm>
-            <a:off x="2816352" y="5989320"/>
-            <a:ext cx="3685032" cy="384048"/>
+          <p:cNvPr id="10" name="Text 7"/>
+          <p:cNvSpPr/>
+          <p:nvPr/>
+        </p:nvSpPr>
+        <p:spPr>
+          <a:xfrm>
+            <a:off x="612648" y="4718304"/>
+            <a:ext cx="3657600" cy="402336"/>
           </a:xfrm>
           <a:prstGeom prst="rect">
             <a:avLst/>
@@ -12057,7 +12297,7 @@
                 <a:ea typeface="Calibri" pitchFamily="34" charset="-122"/>
                 <a:cs typeface="Calibri" pitchFamily="34" charset="-120"/>
               </a:rPr>
-              <a:t>like-for-like RMSE  </a:t>
+              <a:t>held-out TOR R²  </a:t>
             </a:r>
             <a:pPr indent="0" marL="0">
               <a:buNone/>
@@ -12071,7 +12311,7 @@
                 <a:ea typeface="Calibri" pitchFamily="34" charset="-122"/>
                 <a:cs typeface="Calibri" pitchFamily="34" charset="-120"/>
               </a:rPr>
-              <a:t>1.16 vs 1.48–2.24</a:t>
+              <a:t>0.911 vs 0.594–0.775</a:t>
             </a:r>
             <a:endParaRPr lang="en-US" sz="1100" dirty="0"/>
           </a:p>
@@ -12079,18 +12319,18 @@
       </p:sp>
       <p:sp>
         <p:nvSpPr>
-          <p:cNvPr id="18" name="Shape 16"/>
-          <p:cNvSpPr/>
-          <p:nvPr/>
-        </p:nvSpPr>
-        <p:spPr>
-          <a:xfrm>
-            <a:off x="6684264" y="5989320"/>
-            <a:ext cx="3817620" cy="384048"/>
+          <p:cNvPr id="11" name="Shape 8"/>
+          <p:cNvSpPr/>
+          <p:nvPr/>
+        </p:nvSpPr>
+        <p:spPr>
+          <a:xfrm>
+            <a:off x="502920" y="5230368"/>
+            <a:ext cx="3840480" cy="402336"/>
           </a:xfrm>
           <a:prstGeom prst="roundRect">
             <a:avLst>
-              <a:gd name="adj" fmla="val 14286"/>
+              <a:gd name="adj" fmla="val 13636"/>
             </a:avLst>
           </a:prstGeom>
           <a:solidFill>
@@ -12106,14 +12346,14 @@
       </p:sp>
       <p:sp>
         <p:nvSpPr>
-          <p:cNvPr id="19" name="Text 17"/>
-          <p:cNvSpPr/>
-          <p:nvPr/>
-        </p:nvSpPr>
-        <p:spPr>
-          <a:xfrm>
-            <a:off x="6757416" y="5989320"/>
-            <a:ext cx="3726180" cy="384048"/>
+          <p:cNvPr id="12" name="Text 9"/>
+          <p:cNvSpPr/>
+          <p:nvPr/>
+        </p:nvSpPr>
+        <p:spPr>
+          <a:xfrm>
+            <a:off x="612648" y="5230368"/>
+            <a:ext cx="3657600" cy="402336"/>
           </a:xfrm>
           <a:prstGeom prst="rect">
             <a:avLst/>
@@ -12137,7 +12377,7 @@
                 <a:ea typeface="Calibri" pitchFamily="34" charset="-122"/>
                 <a:cs typeface="Calibri" pitchFamily="34" charset="-120"/>
               </a:rPr>
-              <a:t>held-out TOR R²  </a:t>
+              <a:t>fix pushed  </a:t>
             </a:r>
             <a:pPr indent="0" marL="0">
               <a:buNone/>
@@ -12145,15 +12385,54 @@
             <a:r>
               <a:rPr lang="en-US" sz="1100" b="1" dirty="0">
                 <a:solidFill>
-                  <a:srgbClr val="3F7A56"/>
-                </a:solidFill>
-                <a:latin typeface="Calibri" pitchFamily="34" charset="0"/>
-                <a:ea typeface="Calibri" pitchFamily="34" charset="-122"/>
-                <a:cs typeface="Calibri" pitchFamily="34" charset="-120"/>
-              </a:rPr>
-              <a:t>0.911 vs 0.594–0.775</a:t>
+                  <a:srgbClr val="5E6369"/>
+                </a:solidFill>
+                <a:latin typeface="Calibri" pitchFamily="34" charset="0"/>
+                <a:ea typeface="Calibri" pitchFamily="34" charset="-122"/>
+                <a:cs typeface="Calibri" pitchFamily="34" charset="-120"/>
+              </a:rPr>
+              <a:t>53c332e</a:t>
             </a:r>
             <a:endParaRPr lang="en-US" sz="1100" dirty="0"/>
+          </a:p>
+        </p:txBody>
+      </p:sp>
+      <p:sp>
+        <p:nvSpPr>
+          <p:cNvPr id="13" name="Text 10"/>
+          <p:cNvSpPr/>
+          <p:nvPr/>
+        </p:nvSpPr>
+        <p:spPr>
+          <a:xfrm>
+            <a:off x="502920" y="5943600"/>
+            <a:ext cx="4480560" cy="685800"/>
+          </a:xfrm>
+          <a:prstGeom prst="rect">
+            <a:avLst/>
+          </a:prstGeom>
+          <a:noFill/>
+          <a:ln/>
+        </p:spPr>
+        <p:txBody>
+          <a:bodyPr wrap="square" lIns="0" tIns="0" rIns="0" bIns="0" rtlCol="0" anchor="ctr"/>
+          <a:lstStyle/>
+          <a:p>
+            <a:pPr indent="0" marL="0">
+              <a:buNone/>
+            </a:pPr>
+            <a:r>
+              <a:rPr lang="en-US" sz="1050" dirty="0">
+                <a:solidFill>
+                  <a:srgbClr val="5E6369"/>
+                </a:solidFill>
+                <a:latin typeface="Calibri" pitchFamily="34" charset="0"/>
+                <a:ea typeface="Calibri" pitchFamily="34" charset="-122"/>
+                <a:cs typeface="Calibri" pitchFamily="34" charset="-120"/>
+              </a:rPr>
+              <a:t>Also corrected: VIP ρ = 0.74/0.12 uncorroborated · −1.61 → −1.62 · ETBI vs Dry median 43.2 · “91% baseline” = one filter.</a:t>
+            </a:r>
+            <a:endParaRPr lang="en-US" sz="1050" dirty="0"/>
           </a:p>
         </p:txBody>
       </p:sp>
@@ -12253,7 +12532,7 @@
               <a:buNone/>
             </a:pPr>
             <a:r>
-              <a:rPr lang="en-US" sz="2700" b="1" dirty="0">
+              <a:rPr lang="en-US" sz="2600" b="1" dirty="0">
                 <a:solidFill>
                   <a:srgbClr val="1A1D21"/>
                 </a:solidFill>
@@ -12263,7 +12542,7 @@
               </a:rPr>
               <a:t>The deployed calibration reads y = 1.90x − 4.17 at Addis.</a:t>
             </a:r>
-            <a:endParaRPr lang="en-US" sz="2700" dirty="0"/>
+            <a:endParaRPr lang="en-US" sz="2600" dirty="0"/>
           </a:p>
         </p:txBody>
       </p:sp>
@@ -12330,8 +12609,8 @@
         </p:nvSpPr>
         <p:spPr>
           <a:xfrm>
-            <a:off x="4389120" y="5998464"/>
-            <a:ext cx="7223760" cy="310896"/>
+            <a:off x="4389120" y="6016752"/>
+            <a:ext cx="7223760" cy="292608"/>
           </a:xfrm>
           <a:prstGeom prst="rect">
             <a:avLst/>
@@ -12384,7 +12663,7 @@
         <p:spPr>
           <a:xfrm>
             <a:off x="502920" y="1737360"/>
-            <a:ext cx="3566160" cy="3108960"/>
+            <a:ext cx="3566160" cy="2377440"/>
           </a:xfrm>
           <a:prstGeom prst="rect">
             <a:avLst/>
@@ -12445,12 +12724,12 @@
         </p:nvSpPr>
         <p:spPr>
           <a:xfrm>
-            <a:off x="502920" y="5486400"/>
-            <a:ext cx="2231136" cy="384048"/>
+            <a:off x="502920" y="4206240"/>
+            <a:ext cx="3246120" cy="402336"/>
           </a:xfrm>
           <a:prstGeom prst="roundRect">
             <a:avLst>
-              <a:gd name="adj" fmla="val 14286"/>
+              <a:gd name="adj" fmla="val 13636"/>
             </a:avLst>
           </a:prstGeom>
           <a:solidFill>
@@ -12472,8 +12751,8 @@
         </p:nvSpPr>
         <p:spPr>
           <a:xfrm>
-            <a:off x="576072" y="5486400"/>
-            <a:ext cx="2139696" cy="384048"/>
+            <a:off x="612648" y="4206240"/>
+            <a:ext cx="3063240" cy="402336"/>
           </a:xfrm>
           <a:prstGeom prst="rect">
             <a:avLst/>
@@ -12525,12 +12804,12 @@
         </p:nvSpPr>
         <p:spPr>
           <a:xfrm>
-            <a:off x="2898648" y="5486400"/>
-            <a:ext cx="2144268" cy="384048"/>
+            <a:off x="502920" y="4718304"/>
+            <a:ext cx="3246120" cy="402336"/>
           </a:xfrm>
           <a:prstGeom prst="roundRect">
             <a:avLst>
-              <a:gd name="adj" fmla="val 14286"/>
+              <a:gd name="adj" fmla="val 13636"/>
             </a:avLst>
           </a:prstGeom>
           <a:solidFill>
@@ -12552,8 +12831,8 @@
         </p:nvSpPr>
         <p:spPr>
           <a:xfrm>
-            <a:off x="2971800" y="5486400"/>
-            <a:ext cx="2052828" cy="384048"/>
+            <a:off x="612648" y="4718304"/>
+            <a:ext cx="3063240" cy="402336"/>
           </a:xfrm>
           <a:prstGeom prst="rect">
             <a:avLst/>
@@ -12693,7 +12972,7 @@
               <a:buNone/>
             </a:pPr>
             <a:r>
-              <a:rPr lang="en-US" sz="2700" b="1" dirty="0">
+              <a:rPr lang="en-US" sz="2600" b="1" dirty="0">
                 <a:solidFill>
                   <a:srgbClr val="1A1D21"/>
                 </a:solidFill>
@@ -12703,7 +12982,7 @@
               </a:rPr>
               <a:t>Addis-like composition is the extreme tail of IMPROVE — 800 of 13,010 filters.</a:t>
             </a:r>
-            <a:endParaRPr lang="en-US" sz="2700" dirty="0"/>
+            <a:endParaRPr lang="en-US" sz="2600" dirty="0"/>
           </a:p>
         </p:txBody>
       </p:sp>
@@ -12770,8 +13049,8 @@
         </p:nvSpPr>
         <p:spPr>
           <a:xfrm>
-            <a:off x="4389120" y="5998464"/>
-            <a:ext cx="7223760" cy="310896"/>
+            <a:off x="4389120" y="6016752"/>
+            <a:ext cx="7223760" cy="292608"/>
           </a:xfrm>
           <a:prstGeom prst="rect">
             <a:avLst/>
@@ -12824,7 +13103,7 @@
         <p:spPr>
           <a:xfrm>
             <a:off x="502920" y="1737360"/>
-            <a:ext cx="3566160" cy="2377440"/>
+            <a:ext cx="3566160" cy="2103120"/>
           </a:xfrm>
           <a:prstGeom prst="rect">
             <a:avLst/>
@@ -12865,12 +13144,12 @@
         </p:nvSpPr>
         <p:spPr>
           <a:xfrm>
-            <a:off x="502920" y="5486400"/>
-            <a:ext cx="2231136" cy="384048"/>
+            <a:off x="502920" y="4206240"/>
+            <a:ext cx="3246120" cy="402336"/>
           </a:xfrm>
           <a:prstGeom prst="roundRect">
             <a:avLst>
-              <a:gd name="adj" fmla="val 14286"/>
+              <a:gd name="adj" fmla="val 13636"/>
             </a:avLst>
           </a:prstGeom>
           <a:solidFill>
@@ -12892,8 +13171,8 @@
         </p:nvSpPr>
         <p:spPr>
           <a:xfrm>
-            <a:off x="576072" y="5486400"/>
-            <a:ext cx="2139696" cy="384048"/>
+            <a:off x="612648" y="4206240"/>
+            <a:ext cx="3063240" cy="402336"/>
           </a:xfrm>
           <a:prstGeom prst="rect">
             <a:avLst/>
@@ -12945,12 +13224,12 @@
         </p:nvSpPr>
         <p:spPr>
           <a:xfrm>
-            <a:off x="2898648" y="5486400"/>
-            <a:ext cx="3287268" cy="384048"/>
+            <a:off x="502920" y="4718304"/>
+            <a:ext cx="3246120" cy="402336"/>
           </a:xfrm>
           <a:prstGeom prst="roundRect">
             <a:avLst>
-              <a:gd name="adj" fmla="val 14286"/>
+              <a:gd name="adj" fmla="val 13636"/>
             </a:avLst>
           </a:prstGeom>
           <a:solidFill>
@@ -12972,8 +13251,8 @@
         </p:nvSpPr>
         <p:spPr>
           <a:xfrm>
-            <a:off x="2971800" y="5486400"/>
-            <a:ext cx="3195828" cy="384048"/>
+            <a:off x="612648" y="4718304"/>
+            <a:ext cx="3063240" cy="402336"/>
           </a:xfrm>
           <a:prstGeom prst="rect">
             <a:avLst/>
@@ -13113,7 +13392,7 @@
               <a:buNone/>
             </a:pPr>
             <a:r>
-              <a:rPr lang="en-US" sz="2700" b="1" dirty="0">
+              <a:rPr lang="en-US" sz="2600" b="1" dirty="0">
                 <a:solidFill>
                   <a:srgbClr val="1A1D21"/>
                 </a:solidFill>
@@ -13123,7 +13402,7 @@
               </a:rPr>
               <a:t>Lowest-OC/EC + AIRSpec ends at −1.62 — and is protocol-robust.</a:t>
             </a:r>
-            <a:endParaRPr lang="en-US" sz="2700" dirty="0"/>
+            <a:endParaRPr lang="en-US" sz="2600" dirty="0"/>
           </a:p>
         </p:txBody>
       </p:sp>
@@ -13135,8 +13414,8 @@
         </p:nvSpPr>
         <p:spPr>
           <a:xfrm>
-            <a:off x="3566160" y="1554480"/>
-            <a:ext cx="8138160" cy="4773168"/>
+            <a:off x="3977640" y="1554480"/>
+            <a:ext cx="7726680" cy="4773168"/>
           </a:xfrm>
           <a:prstGeom prst="rect">
             <a:avLst/>
@@ -13174,8 +13453,8 @@
         </p:blipFill>
         <p:spPr>
           <a:xfrm>
-            <a:off x="3621024" y="1609344"/>
-            <a:ext cx="8028432" cy="4370832"/>
+            <a:off x="4032504" y="1609344"/>
+            <a:ext cx="7616952" cy="4370832"/>
           </a:xfrm>
           <a:prstGeom prst="rect">
             <a:avLst/>
@@ -13190,8 +13469,8 @@
         </p:nvSpPr>
         <p:spPr>
           <a:xfrm>
-            <a:off x="3657600" y="5998464"/>
-            <a:ext cx="7955280" cy="310896"/>
+            <a:off x="4069080" y="6016752"/>
+            <a:ext cx="7543800" cy="292608"/>
           </a:xfrm>
           <a:prstGeom prst="rect">
             <a:avLst/>
@@ -13244,7 +13523,7 @@
         <p:spPr>
           <a:xfrm>
             <a:off x="502920" y="1737360"/>
-            <a:ext cx="2834640" cy="3108960"/>
+            <a:ext cx="3246120" cy="3200400"/>
           </a:xfrm>
           <a:prstGeom prst="rect">
             <a:avLst/>
@@ -13283,7 +13562,7 @@
               <a:buNone/>
             </a:pPr>
             <a:r>
-              <a:rPr lang="en-US" sz="1200" dirty="0">
+              <a:rPr lang="en-US" sz="1250" dirty="0">
                 <a:solidFill>
                   <a:srgbClr val="1A1D21"/>
                 </a:solidFill>
@@ -13295,6 +13574,26 @@
             </a:r>
             <a:endParaRPr lang="en-US" sz="1250" dirty="0"/>
           </a:p>
+          <a:p>
+            <a:pPr algn="l" indent="0" marL="0">
+              <a:spcAft>
+                <a:spcPts val="800"/>
+              </a:spcAft>
+              <a:buNone/>
+            </a:pPr>
+            <a:r>
+              <a:rPr lang="en-US" sz="1150" dirty="0">
+                <a:solidFill>
+                  <a:srgbClr val="5E6369"/>
+                </a:solidFill>
+                <a:latin typeface="Calibri" pitchFamily="34" charset="0"/>
+                <a:ea typeface="Calibri" pitchFamily="34" charset="-122"/>
+                <a:cs typeface="Calibri" pitchFamily="34" charset="-120"/>
+              </a:rPr>
+              <a:t>Tone call for tomorrow: the deck says MAC 10 is where it “lands closest” — deliberately not “self-consistent”, since 0.86 fails ftir_19's |slope−1| ≤ 0.1 bar.</a:t>
+            </a:r>
+            <a:endParaRPr lang="en-US" sz="1250" dirty="0"/>
+          </a:p>
         </p:txBody>
       </p:sp>
       <p:sp>
@@ -13305,12 +13604,12 @@
         </p:nvSpPr>
         <p:spPr>
           <a:xfrm>
-            <a:off x="502920" y="5486400"/>
-            <a:ext cx="1787652" cy="384048"/>
+            <a:off x="502920" y="4846320"/>
+            <a:ext cx="3246120" cy="402336"/>
           </a:xfrm>
           <a:prstGeom prst="roundRect">
             <a:avLst>
-              <a:gd name="adj" fmla="val 14286"/>
+              <a:gd name="adj" fmla="val 13636"/>
             </a:avLst>
           </a:prstGeom>
           <a:solidFill>
@@ -13332,8 +13631,8 @@
         </p:nvSpPr>
         <p:spPr>
           <a:xfrm>
-            <a:off x="576072" y="5486400"/>
-            <a:ext cx="1696212" cy="384048"/>
+            <a:off x="612648" y="4846320"/>
+            <a:ext cx="3063240" cy="402336"/>
           </a:xfrm>
           <a:prstGeom prst="rect">
             <a:avLst/>
@@ -13385,12 +13684,12 @@
         </p:nvSpPr>
         <p:spPr>
           <a:xfrm>
-            <a:off x="2455164" y="5486400"/>
-            <a:ext cx="3113532" cy="384048"/>
+            <a:off x="502920" y="5358384"/>
+            <a:ext cx="3246120" cy="402336"/>
           </a:xfrm>
           <a:prstGeom prst="roundRect">
             <a:avLst>
-              <a:gd name="adj" fmla="val 14286"/>
+              <a:gd name="adj" fmla="val 13636"/>
             </a:avLst>
           </a:prstGeom>
           <a:solidFill>
@@ -13412,8 +13711,8 @@
         </p:nvSpPr>
         <p:spPr>
           <a:xfrm>
-            <a:off x="2528316" y="5486400"/>
-            <a:ext cx="3022092" cy="384048"/>
+            <a:off x="612648" y="5358384"/>
+            <a:ext cx="3063240" cy="402336"/>
           </a:xfrm>
           <a:prstGeom prst="rect">
             <a:avLst/>
@@ -13553,7 +13852,7 @@
               <a:buNone/>
             </a:pPr>
             <a:r>
-              <a:rPr lang="en-US" sz="2700" b="1" dirty="0">
+              <a:rPr lang="en-US" sz="2600" b="1" dirty="0">
                 <a:solidFill>
                   <a:srgbClr val="1A1D21"/>
                 </a:solidFill>
@@ -13563,7 +13862,7 @@
               </a:rPr>
               <a:t>~91% of a raw Addis spectrum at the CH band is background — and Addis rides a higher background than its cohort.</a:t>
             </a:r>
-            <a:endParaRPr lang="en-US" sz="2700" dirty="0"/>
+            <a:endParaRPr lang="en-US" sz="2600" dirty="0"/>
           </a:p>
         </p:txBody>
       </p:sp>
@@ -13576,7 +13875,7 @@
         <p:spPr>
           <a:xfrm>
             <a:off x="502920" y="1600200"/>
-            <a:ext cx="5577840" cy="4315968"/>
+            <a:ext cx="5577840" cy="4270248"/>
           </a:xfrm>
           <a:prstGeom prst="rect">
             <a:avLst/>
@@ -13615,7 +13914,7 @@
         <p:spPr>
           <a:xfrm>
             <a:off x="557784" y="1655064"/>
-            <a:ext cx="5468112" cy="3913632"/>
+            <a:ext cx="5468112" cy="3867912"/>
           </a:xfrm>
           <a:prstGeom prst="rect">
             <a:avLst/>
@@ -13630,8 +13929,8 @@
         </p:nvSpPr>
         <p:spPr>
           <a:xfrm>
-            <a:off x="594360" y="5586984"/>
-            <a:ext cx="5394960" cy="310896"/>
+            <a:off x="594360" y="5559552"/>
+            <a:ext cx="5394960" cy="292608"/>
           </a:xfrm>
           <a:prstGeom prst="rect">
             <a:avLst/>
@@ -13684,7 +13983,7 @@
         <p:spPr>
           <a:xfrm>
             <a:off x="6263640" y="1600200"/>
-            <a:ext cx="5577840" cy="4315968"/>
+            <a:ext cx="5577840" cy="4270248"/>
           </a:xfrm>
           <a:prstGeom prst="rect">
             <a:avLst/>
@@ -13723,7 +14022,7 @@
         <p:spPr>
           <a:xfrm>
             <a:off x="6318504" y="1655064"/>
-            <a:ext cx="5468112" cy="3913632"/>
+            <a:ext cx="5468112" cy="3867912"/>
           </a:xfrm>
           <a:prstGeom prst="rect">
             <a:avLst/>
@@ -13738,8 +14037,8 @@
         </p:nvSpPr>
         <p:spPr>
           <a:xfrm>
-            <a:off x="6355080" y="5586984"/>
-            <a:ext cx="5394960" cy="310896"/>
+            <a:off x="6355080" y="5559552"/>
+            <a:ext cx="5394960" cy="292608"/>
           </a:xfrm>
           <a:prstGeom prst="rect">
             <a:avLst/>
@@ -14119,7 +14418,7 @@
               <a:buNone/>
             </a:pPr>
             <a:r>
-              <a:rPr lang="en-US" sz="2700" b="1" dirty="0">
+              <a:rPr lang="en-US" sz="2600" b="1" dirty="0">
                 <a:solidFill>
                   <a:srgbClr val="1A1D21"/>
                 </a:solidFill>
@@ -14129,7 +14428,7 @@
               </a:rPr>
               <a:t>The AIRSpec improvement is real — and so is what remains.</a:t>
             </a:r>
-            <a:endParaRPr lang="en-US" sz="2700" dirty="0"/>
+            <a:endParaRPr lang="en-US" sz="2600" dirty="0"/>
           </a:p>
         </p:txBody>
       </p:sp>
@@ -14196,8 +14495,8 @@
         </p:nvSpPr>
         <p:spPr>
           <a:xfrm>
-            <a:off x="4114800" y="5998464"/>
-            <a:ext cx="7498080" cy="310896"/>
+            <a:off x="4114800" y="6016752"/>
+            <a:ext cx="7498080" cy="292608"/>
           </a:xfrm>
           <a:prstGeom prst="rect">
             <a:avLst/>
@@ -14250,7 +14549,7 @@
         <p:spPr>
           <a:xfrm>
             <a:off x="502920" y="1737360"/>
-            <a:ext cx="3291840" cy="3291840"/>
+            <a:ext cx="3291840" cy="2834640"/>
           </a:xfrm>
           <a:prstGeom prst="rect">
             <a:avLst/>
@@ -14301,26 +14600,6 @@
             </a:r>
             <a:endParaRPr lang="en-US" sz="1250" dirty="0"/>
           </a:p>
-          <a:p>
-            <a:pPr algn="l" indent="0" marL="0">
-              <a:spcAft>
-                <a:spcPts val="800"/>
-              </a:spcAft>
-              <a:buNone/>
-            </a:pPr>
-            <a:r>
-              <a:rPr lang="en-US" sz="1150" dirty="0">
-                <a:solidFill>
-                  <a:srgbClr val="5E6369"/>
-                </a:solidFill>
-                <a:latin typeface="Calibri" pitchFamily="34" charset="0"/>
-                <a:ea typeface="Calibri" pitchFamily="34" charset="-122"/>
-                <a:cs typeface="Calibri" pitchFamily="34" charset="-120"/>
-              </a:rPr>
-              <a:t>Corrected 95% CI [−1.78, −1.06]; raw [−4.88, −2.81].</a:t>
-            </a:r>
-            <a:endParaRPr lang="en-US" sz="1250" dirty="0"/>
-          </a:p>
         </p:txBody>
       </p:sp>
       <p:sp>
@@ -14331,12 +14610,12 @@
         </p:nvSpPr>
         <p:spPr>
           <a:xfrm>
-            <a:off x="502920" y="5486400"/>
-            <a:ext cx="2551176" cy="384048"/>
+            <a:off x="502920" y="4251960"/>
+            <a:ext cx="3246120" cy="402336"/>
           </a:xfrm>
           <a:prstGeom prst="roundRect">
             <a:avLst>
-              <a:gd name="adj" fmla="val 14286"/>
+              <a:gd name="adj" fmla="val 13636"/>
             </a:avLst>
           </a:prstGeom>
           <a:solidFill>
@@ -14358,8 +14637,8 @@
         </p:nvSpPr>
         <p:spPr>
           <a:xfrm>
-            <a:off x="576072" y="5486400"/>
-            <a:ext cx="2459736" cy="384048"/>
+            <a:off x="612648" y="4251960"/>
+            <a:ext cx="3063240" cy="402336"/>
           </a:xfrm>
           <a:prstGeom prst="rect">
             <a:avLst/>
@@ -14383,7 +14662,7 @@
                 <a:ea typeface="Calibri" pitchFamily="34" charset="-122"/>
                 <a:cs typeface="Calibri" pitchFamily="34" charset="-120"/>
               </a:rPr>
-              <a:t>corrected CI  </a:t>
+              <a:t>corrected 95% CI  </a:t>
             </a:r>
             <a:pPr indent="0" marL="0">
               <a:buNone/>
@@ -14397,7 +14676,7 @@
                 <a:ea typeface="Calibri" pitchFamily="34" charset="-122"/>
                 <a:cs typeface="Calibri" pitchFamily="34" charset="-120"/>
               </a:rPr>
-              <a:t>excludes 0</a:t>
+              <a:t>[−1.78, −1.06]</a:t>
             </a:r>
             <a:endParaRPr lang="en-US" sz="1100" dirty="0"/>
           </a:p>
@@ -14411,12 +14690,12 @@
         </p:nvSpPr>
         <p:spPr>
           <a:xfrm>
-            <a:off x="3218688" y="5486400"/>
-            <a:ext cx="2436876" cy="384048"/>
+            <a:off x="502920" y="4764024"/>
+            <a:ext cx="3246120" cy="402336"/>
           </a:xfrm>
           <a:prstGeom prst="roundRect">
             <a:avLst>
-              <a:gd name="adj" fmla="val 14286"/>
+              <a:gd name="adj" fmla="val 13636"/>
             </a:avLst>
           </a:prstGeom>
           <a:solidFill>
@@ -14438,8 +14717,8 @@
         </p:nvSpPr>
         <p:spPr>
           <a:xfrm>
-            <a:off x="3291840" y="5486400"/>
-            <a:ext cx="2345436" cy="384048"/>
+            <a:off x="612648" y="4764024"/>
+            <a:ext cx="3063240" cy="402336"/>
           </a:xfrm>
           <a:prstGeom prst="rect">
             <a:avLst/>
@@ -14463,7 +14742,7 @@
                 <a:ea typeface="Calibri" pitchFamily="34" charset="-122"/>
                 <a:cs typeface="Calibri" pitchFamily="34" charset="-120"/>
               </a:rPr>
-              <a:t>distributions  </a:t>
+              <a:t>raw 95% CI  </a:t>
             </a:r>
             <a:pPr indent="0" marL="0">
               <a:buNone/>
@@ -14471,13 +14750,93 @@
             <a:r>
               <a:rPr lang="en-US" sz="1100" b="1" dirty="0">
                 <a:solidFill>
+                  <a:srgbClr val="B23327"/>
+                </a:solidFill>
+                <a:latin typeface="Calibri" pitchFamily="34" charset="0"/>
+                <a:ea typeface="Calibri" pitchFamily="34" charset="-122"/>
+                <a:cs typeface="Calibri" pitchFamily="34" charset="-120"/>
+              </a:rPr>
+              <a:t>[−4.88, −2.81]</a:t>
+            </a:r>
+            <a:endParaRPr lang="en-US" sz="1100" dirty="0"/>
+          </a:p>
+        </p:txBody>
+      </p:sp>
+      <p:sp>
+        <p:nvSpPr>
+          <p:cNvPr id="12" name="Shape 9"/>
+          <p:cNvSpPr/>
+          <p:nvPr/>
+        </p:nvSpPr>
+        <p:spPr>
+          <a:xfrm>
+            <a:off x="502920" y="5276088"/>
+            <a:ext cx="3246120" cy="402336"/>
+          </a:xfrm>
+          <a:prstGeom prst="roundRect">
+            <a:avLst>
+              <a:gd name="adj" fmla="val 13636"/>
+            </a:avLst>
+          </a:prstGeom>
+          <a:solidFill>
+            <a:srgbClr val="F4F5F3"/>
+          </a:solidFill>
+          <a:ln w="9525">
+            <a:solidFill>
+              <a:srgbClr val="DDE0DC"/>
+            </a:solidFill>
+            <a:prstDash val="solid"/>
+          </a:ln>
+        </p:spPr>
+      </p:sp>
+      <p:sp>
+        <p:nvSpPr>
+          <p:cNvPr id="13" name="Text 10"/>
+          <p:cNvSpPr/>
+          <p:nvPr/>
+        </p:nvSpPr>
+        <p:spPr>
+          <a:xfrm>
+            <a:off x="612648" y="5276088"/>
+            <a:ext cx="3063240" cy="402336"/>
+          </a:xfrm>
+          <a:prstGeom prst="rect">
+            <a:avLst/>
+          </a:prstGeom>
+          <a:noFill/>
+          <a:ln/>
+        </p:spPr>
+        <p:txBody>
+          <a:bodyPr wrap="square" lIns="0" tIns="0" rIns="0" bIns="0" rtlCol="0" anchor="ctr"/>
+          <a:lstStyle/>
+          <a:p>
+            <a:pPr indent="0" marL="0">
+              <a:buNone/>
+            </a:pPr>
+            <a:r>
+              <a:rPr lang="en-US" sz="1100" dirty="0">
+                <a:solidFill>
+                  <a:srgbClr val="5E6369"/>
+                </a:solidFill>
+                <a:latin typeface="Calibri" pitchFamily="34" charset="0"/>
+                <a:ea typeface="Calibri" pitchFamily="34" charset="-122"/>
+                <a:cs typeface="Calibri" pitchFamily="34" charset="-120"/>
+              </a:rPr>
+              <a:t>overlap  </a:t>
+            </a:r>
+            <a:pPr indent="0" marL="0">
+              <a:buNone/>
+            </a:pPr>
+            <a:r>
+              <a:rPr lang="en-US" sz="1100" b="1" dirty="0">
+                <a:solidFill>
                   <a:srgbClr val="2C6E9E"/>
                 </a:solidFill>
                 <a:latin typeface="Calibri" pitchFamily="34" charset="0"/>
                 <a:ea typeface="Calibri" pitchFamily="34" charset="-122"/>
                 <a:cs typeface="Calibri" pitchFamily="34" charset="-120"/>
               </a:rPr>
-              <a:t>disjoint</a:t>
+              <a:t>none</a:t>
             </a:r>
             <a:endParaRPr lang="en-US" sz="1100" dirty="0"/>
           </a:p>
@@ -14579,7 +14938,7 @@
               <a:buNone/>
             </a:pPr>
             <a:r>
-              <a:rPr lang="en-US" sz="2700" b="1" dirty="0">
+              <a:rPr lang="en-US" sz="2600" b="1" dirty="0">
                 <a:solidFill>
                   <a:srgbClr val="1A1D21"/>
                 </a:solidFill>
@@ -14589,7 +14948,7 @@
               </a:rPr>
               <a:t>The corrected model misses by a flat constant — and Dry was already separating.</a:t>
             </a:r>
-            <a:endParaRPr lang="en-US" sz="2700" dirty="0"/>
+            <a:endParaRPr lang="en-US" sz="2600" dirty="0"/>
           </a:p>
         </p:txBody>
       </p:sp>
@@ -14656,8 +15015,8 @@
         </p:nvSpPr>
         <p:spPr>
           <a:xfrm>
-            <a:off x="4114800" y="5998464"/>
-            <a:ext cx="7498080" cy="310896"/>
+            <a:off x="4114800" y="6016752"/>
+            <a:ext cx="7498080" cy="292608"/>
           </a:xfrm>
           <a:prstGeom prst="rect">
             <a:avLst/>
@@ -14710,7 +15069,7 @@
         <p:spPr>
           <a:xfrm>
             <a:off x="502920" y="1737360"/>
-            <a:ext cx="3291840" cy="3291840"/>
+            <a:ext cx="3291840" cy="3017520"/>
           </a:xfrm>
           <a:prstGeom prst="rect">
             <a:avLst/>
@@ -14737,7 +15096,7 @@
                 <a:ea typeface="Calibri" pitchFamily="34" charset="-122"/>
                 <a:cs typeface="Calibri" pitchFamily="34" charset="-120"/>
               </a:rPr>
-              <a:t>Raw model: error tracks extrapolation distance (r = 0.71) and flips sign by season.</a:t>
+              <a:t>Raw model: error tracks extrapolation distance and flips sign by season.</a:t>
             </a:r>
             <a:endParaRPr lang="en-US" sz="1250" dirty="0"/>
           </a:p>
@@ -14791,12 +15150,12 @@
         </p:nvSpPr>
         <p:spPr>
           <a:xfrm>
-            <a:off x="502920" y="5486400"/>
-            <a:ext cx="2610612" cy="384048"/>
+            <a:off x="502920" y="4572000"/>
+            <a:ext cx="3246120" cy="402336"/>
           </a:xfrm>
           <a:prstGeom prst="roundRect">
             <a:avLst>
-              <a:gd name="adj" fmla="val 14286"/>
+              <a:gd name="adj" fmla="val 13636"/>
             </a:avLst>
           </a:prstGeom>
           <a:solidFill>
@@ -14818,8 +15177,8 @@
         </p:nvSpPr>
         <p:spPr>
           <a:xfrm>
-            <a:off x="576072" y="5486400"/>
-            <a:ext cx="2519172" cy="384048"/>
+            <a:off x="612648" y="4572000"/>
+            <a:ext cx="3063240" cy="402336"/>
           </a:xfrm>
           <a:prstGeom prst="rect">
             <a:avLst/>
@@ -14871,12 +15230,12 @@
         </p:nvSpPr>
         <p:spPr>
           <a:xfrm>
-            <a:off x="3278124" y="5486400"/>
-            <a:ext cx="2798064" cy="384048"/>
+            <a:off x="502920" y="5084064"/>
+            <a:ext cx="3246120" cy="402336"/>
           </a:xfrm>
           <a:prstGeom prst="roundRect">
             <a:avLst>
-              <a:gd name="adj" fmla="val 14286"/>
+              <a:gd name="adj" fmla="val 13636"/>
             </a:avLst>
           </a:prstGeom>
           <a:solidFill>
@@ -14898,8 +15257,8 @@
         </p:nvSpPr>
         <p:spPr>
           <a:xfrm>
-            <a:off x="3351276" y="5486400"/>
-            <a:ext cx="2706624" cy="384048"/>
+            <a:off x="612648" y="5084064"/>
+            <a:ext cx="3063240" cy="402336"/>
           </a:xfrm>
           <a:prstGeom prst="rect">
             <a:avLst/>
@@ -14937,7 +15296,7 @@
                 <a:ea typeface="Calibri" pitchFamily="34" charset="-122"/>
                 <a:cs typeface="Calibri" pitchFamily="34" charset="-120"/>
               </a:rPr>
-              <a:t>−2.0…−2.6</a:t>
+              <a:t>−2.0 … −2.6</a:t>
             </a:r>
             <a:endParaRPr lang="en-US" sz="1100" dirty="0"/>
           </a:p>
@@ -14951,12 +15310,12 @@
         </p:nvSpPr>
         <p:spPr>
           <a:xfrm>
-            <a:off x="6240780" y="5486400"/>
-            <a:ext cx="2171700" cy="384048"/>
+            <a:off x="502920" y="5596128"/>
+            <a:ext cx="3246120" cy="402336"/>
           </a:xfrm>
           <a:prstGeom prst="roundRect">
             <a:avLst>
-              <a:gd name="adj" fmla="val 14286"/>
+              <a:gd name="adj" fmla="val 13636"/>
             </a:avLst>
           </a:prstGeom>
           <a:solidFill>
@@ -14978,8 +15337,8 @@
         </p:nvSpPr>
         <p:spPr>
           <a:xfrm>
-            <a:off x="6313932" y="5486400"/>
-            <a:ext cx="2080260" cy="384048"/>
+            <a:off x="612648" y="5596128"/>
+            <a:ext cx="3063240" cy="402336"/>
           </a:xfrm>
           <a:prstGeom prst="rect">
             <a:avLst/>
